--- a/ゲーム科1年/01_後期/プログラミングⅢ/26_マルチスレッド.pptx
+++ b/ゲーム科1年/01_後期/プログラミングⅢ/26_マルチスレッド.pptx
@@ -16,15 +16,6 @@
     <p:sldId id="264" r:id="rId10"/>
     <p:sldId id="265" r:id="rId11"/>
     <p:sldId id="266" r:id="rId12"/>
-    <p:sldId id="267" r:id="rId13"/>
-    <p:sldId id="268" r:id="rId14"/>
-    <p:sldId id="269" r:id="rId15"/>
-    <p:sldId id="270" r:id="rId16"/>
-    <p:sldId id="271" r:id="rId17"/>
-    <p:sldId id="272" r:id="rId18"/>
-    <p:sldId id="273" r:id="rId19"/>
-    <p:sldId id="274" r:id="rId20"/>
-    <p:sldId id="275" r:id="rId21"/>
   </p:sldIdLst>
   <p:sldSz cx="12192000" cy="6858000"/>
   <p:notesSz cx="6858000" cy="9144000"/>
@@ -278,7 +269,7 @@
           <a:p>
             <a:fld id="{E9CC885B-4903-4D54-9A93-00025F12DED9}" type="datetimeFigureOut">
               <a:rPr kumimoji="1" lang="ja-JP" altLang="en-US" smtClean="0"/>
-              <a:t>2025/9/24</a:t>
+              <a:t>2026/3/12</a:t>
             </a:fld>
             <a:endParaRPr kumimoji="1" lang="ja-JP" altLang="en-US"/>
           </a:p>
@@ -508,7 +499,7 @@
           <a:p>
             <a:fld id="{E9CC885B-4903-4D54-9A93-00025F12DED9}" type="datetimeFigureOut">
               <a:rPr kumimoji="1" lang="ja-JP" altLang="en-US" smtClean="0"/>
-              <a:t>2025/9/24</a:t>
+              <a:t>2026/3/12</a:t>
             </a:fld>
             <a:endParaRPr kumimoji="1" lang="ja-JP" altLang="en-US"/>
           </a:p>
@@ -748,7 +739,7 @@
           <a:p>
             <a:fld id="{E9CC885B-4903-4D54-9A93-00025F12DED9}" type="datetimeFigureOut">
               <a:rPr kumimoji="1" lang="ja-JP" altLang="en-US" smtClean="0"/>
-              <a:t>2025/9/24</a:t>
+              <a:t>2026/3/12</a:t>
             </a:fld>
             <a:endParaRPr kumimoji="1" lang="ja-JP" altLang="en-US"/>
           </a:p>
@@ -978,7 +969,7 @@
           <a:p>
             <a:fld id="{E9CC885B-4903-4D54-9A93-00025F12DED9}" type="datetimeFigureOut">
               <a:rPr kumimoji="1" lang="ja-JP" altLang="en-US" smtClean="0"/>
-              <a:t>2025/9/24</a:t>
+              <a:t>2026/3/12</a:t>
             </a:fld>
             <a:endParaRPr kumimoji="1" lang="ja-JP" altLang="en-US"/>
           </a:p>
@@ -1253,7 +1244,7 @@
           <a:p>
             <a:fld id="{E9CC885B-4903-4D54-9A93-00025F12DED9}" type="datetimeFigureOut">
               <a:rPr kumimoji="1" lang="ja-JP" altLang="en-US" smtClean="0"/>
-              <a:t>2025/9/24</a:t>
+              <a:t>2026/3/12</a:t>
             </a:fld>
             <a:endParaRPr kumimoji="1" lang="ja-JP" altLang="en-US"/>
           </a:p>
@@ -1582,7 +1573,7 @@
           <a:p>
             <a:fld id="{E9CC885B-4903-4D54-9A93-00025F12DED9}" type="datetimeFigureOut">
               <a:rPr kumimoji="1" lang="ja-JP" altLang="en-US" smtClean="0"/>
-              <a:t>2025/9/24</a:t>
+              <a:t>2026/3/12</a:t>
             </a:fld>
             <a:endParaRPr kumimoji="1" lang="ja-JP" altLang="en-US"/>
           </a:p>
@@ -2058,7 +2049,7 @@
           <a:p>
             <a:fld id="{E9CC885B-4903-4D54-9A93-00025F12DED9}" type="datetimeFigureOut">
               <a:rPr kumimoji="1" lang="ja-JP" altLang="en-US" smtClean="0"/>
-              <a:t>2025/9/24</a:t>
+              <a:t>2026/3/12</a:t>
             </a:fld>
             <a:endParaRPr kumimoji="1" lang="ja-JP" altLang="en-US"/>
           </a:p>
@@ -2199,7 +2190,7 @@
           <a:p>
             <a:fld id="{E9CC885B-4903-4D54-9A93-00025F12DED9}" type="datetimeFigureOut">
               <a:rPr kumimoji="1" lang="ja-JP" altLang="en-US" smtClean="0"/>
-              <a:t>2025/9/24</a:t>
+              <a:t>2026/3/12</a:t>
             </a:fld>
             <a:endParaRPr kumimoji="1" lang="ja-JP" altLang="en-US"/>
           </a:p>
@@ -2312,7 +2303,7 @@
           <a:p>
             <a:fld id="{E9CC885B-4903-4D54-9A93-00025F12DED9}" type="datetimeFigureOut">
               <a:rPr kumimoji="1" lang="ja-JP" altLang="en-US" smtClean="0"/>
-              <a:t>2025/9/24</a:t>
+              <a:t>2026/3/12</a:t>
             </a:fld>
             <a:endParaRPr kumimoji="1" lang="ja-JP" altLang="en-US"/>
           </a:p>
@@ -2655,7 +2646,7 @@
           <a:p>
             <a:fld id="{E9CC885B-4903-4D54-9A93-00025F12DED9}" type="datetimeFigureOut">
               <a:rPr kumimoji="1" lang="ja-JP" altLang="en-US" smtClean="0"/>
-              <a:t>2025/9/24</a:t>
+              <a:t>2026/3/12</a:t>
             </a:fld>
             <a:endParaRPr kumimoji="1" lang="ja-JP" altLang="en-US"/>
           </a:p>
@@ -2943,7 +2934,7 @@
           <a:p>
             <a:fld id="{E9CC885B-4903-4D54-9A93-00025F12DED9}" type="datetimeFigureOut">
               <a:rPr kumimoji="1" lang="ja-JP" altLang="en-US" smtClean="0"/>
-              <a:t>2025/9/24</a:t>
+              <a:t>2026/3/12</a:t>
             </a:fld>
             <a:endParaRPr kumimoji="1" lang="ja-JP" altLang="en-US"/>
           </a:p>
@@ -3216,7 +3207,7 @@
           <a:p>
             <a:fld id="{E9CC885B-4903-4D54-9A93-00025F12DED9}" type="datetimeFigureOut">
               <a:rPr kumimoji="1" lang="ja-JP" altLang="en-US" smtClean="0"/>
-              <a:t>2025/9/24</a:t>
+              <a:t>2026/3/12</a:t>
             </a:fld>
             <a:endParaRPr kumimoji="1" lang="ja-JP" altLang="en-US"/>
           </a:p>
@@ -3648,7 +3639,7 @@
         <p:spPr>
           <a:xfrm>
             <a:off x="567542" y="491954"/>
-            <a:ext cx="3877985" cy="584775"/>
+            <a:ext cx="3057247" cy="584775"/>
           </a:xfrm>
           <a:prstGeom prst="rect">
             <a:avLst/>
@@ -3663,7 +3654,7 @@
           <a:p>
             <a:r>
               <a:rPr lang="ja-JP" altLang="en-US" sz="3200" b="1" u="sng" dirty="0"/>
-              <a:t>スマートポインター</a:t>
+              <a:t>マルチスレッド</a:t>
             </a:r>
             <a:endParaRPr kumimoji="1" lang="ja-JP" altLang="en-US" sz="3200" b="1" u="sng" dirty="0"/>
           </a:p>
@@ -3684,7 +3675,7 @@
         <p:spPr>
           <a:xfrm>
             <a:off x="567542" y="1216429"/>
-            <a:ext cx="10033516" cy="2677656"/>
+            <a:ext cx="7879080" cy="1938992"/>
           </a:xfrm>
           <a:prstGeom prst="rect">
             <a:avLst/>
@@ -3698,47 +3689,38 @@
           <a:lstStyle/>
           <a:p>
             <a:r>
+              <a:rPr lang="en-US" altLang="ja-JP" sz="2400" dirty="0"/>
+              <a:t>C++</a:t>
+            </a:r>
+            <a:r>
+              <a:rPr lang="ja-JP" altLang="en-US" sz="2400" dirty="0"/>
+              <a:t>には</a:t>
+            </a:r>
+            <a:r>
               <a:rPr lang="ja-JP" altLang="en-US" sz="2400" b="1" dirty="0">
                 <a:solidFill>
                   <a:srgbClr val="FF0000"/>
                 </a:solidFill>
               </a:rPr>
-              <a:t>オブジェクトの生成、削除</a:t>
+              <a:t>マルチスレッド</a:t>
             </a:r>
             <a:r>
               <a:rPr lang="ja-JP" altLang="en-US" sz="2400" dirty="0"/>
-              <a:t>には</a:t>
-            </a:r>
-            <a:r>
-              <a:rPr lang="en-US" altLang="ja-JP" sz="2400" b="1" dirty="0">
-                <a:solidFill>
-                  <a:srgbClr val="0070C0"/>
-                </a:solidFill>
-              </a:rPr>
-              <a:t>new</a:t>
-            </a:r>
-            <a:r>
-              <a:rPr lang="en-US" altLang="ja-JP" sz="2400" dirty="0"/>
-              <a:t>, </a:t>
-            </a:r>
-            <a:r>
-              <a:rPr lang="en-US" altLang="ja-JP" sz="2400" b="1" dirty="0">
-                <a:solidFill>
-                  <a:srgbClr val="0070C0"/>
-                </a:solidFill>
-              </a:rPr>
-              <a:t>delete</a:t>
-            </a:r>
+              <a:t>機能があります。</a:t>
+            </a:r>
+            <a:endParaRPr lang="en-US" altLang="ja-JP" sz="2400" dirty="0"/>
+          </a:p>
+          <a:p>
             <a:r>
               <a:rPr lang="ja-JP" altLang="en-US" sz="2400" dirty="0"/>
-              <a:t>を使用してきましたが、</a:t>
+              <a:t>スレッドとは処理のことです。</a:t>
             </a:r>
             <a:endParaRPr lang="en-US" altLang="ja-JP" sz="2400" dirty="0"/>
           </a:p>
           <a:p>
             <a:r>
               <a:rPr lang="ja-JP" altLang="en-US" sz="2400" dirty="0"/>
-              <a:t>これらには明確な</a:t>
+              <a:t>つまり、</a:t>
             </a:r>
             <a:r>
               <a:rPr lang="ja-JP" altLang="en-US" sz="2400" b="1" dirty="0">
@@ -3746,11 +3728,11 @@
                   <a:srgbClr val="FF0000"/>
                 </a:solidFill>
               </a:rPr>
-              <a:t>欠点</a:t>
+              <a:t>複数の処理を同時に走らせる機能</a:t>
             </a:r>
             <a:r>
               <a:rPr lang="ja-JP" altLang="en-US" sz="2400" dirty="0"/>
-              <a:t>があります。</a:t>
+              <a:t>になります。</a:t>
             </a:r>
             <a:endParaRPr lang="en-US" altLang="ja-JP" sz="2400" dirty="0"/>
           </a:p>
@@ -3760,66 +3742,9 @@
           <a:p>
             <a:r>
               <a:rPr lang="ja-JP" altLang="en-US" sz="2400" dirty="0"/>
-              <a:t>それは、</a:t>
-            </a:r>
-            <a:r>
-              <a:rPr lang="en-US" altLang="ja-JP" sz="2400" b="1" dirty="0">
-                <a:solidFill>
-                  <a:srgbClr val="0070C0"/>
-                </a:solidFill>
-              </a:rPr>
-              <a:t>delete</a:t>
-            </a:r>
-            <a:r>
-              <a:rPr lang="ja-JP" altLang="en-US" sz="2400" dirty="0"/>
-              <a:t>を書き忘れたときの</a:t>
-            </a:r>
-            <a:r>
-              <a:rPr lang="ja-JP" altLang="en-US" sz="2400" b="1" dirty="0">
-                <a:solidFill>
-                  <a:srgbClr val="FF0000"/>
-                </a:solidFill>
-              </a:rPr>
-              <a:t>メモリリーク</a:t>
-            </a:r>
-            <a:r>
-              <a:rPr lang="ja-JP" altLang="en-US" sz="2400" dirty="0"/>
-              <a:t>です。</a:t>
+              <a:t>簡単に練習します。</a:t>
             </a:r>
             <a:endParaRPr lang="en-US" altLang="ja-JP" sz="2400" dirty="0"/>
-          </a:p>
-          <a:p>
-            <a:r>
-              <a:rPr lang="ja-JP" altLang="en-US" sz="2400" dirty="0"/>
-              <a:t>多くのゲームプログラマーが、このメモリリークと格闘していました。</a:t>
-            </a:r>
-            <a:endParaRPr lang="en-US" altLang="ja-JP" sz="2400" dirty="0"/>
-          </a:p>
-          <a:p>
-            <a:endParaRPr lang="en-US" altLang="ja-JP" sz="2400" dirty="0"/>
-          </a:p>
-          <a:p>
-            <a:r>
-              <a:rPr lang="en-US" altLang="ja-JP" sz="2400" b="1" dirty="0">
-                <a:solidFill>
-                  <a:srgbClr val="FF0000"/>
-                </a:solidFill>
-              </a:rPr>
-              <a:t>※</a:t>
-            </a:r>
-            <a:r>
-              <a:rPr lang="ja-JP" altLang="en-US" sz="2400" b="1" dirty="0">
-                <a:solidFill>
-                  <a:srgbClr val="FF0000"/>
-                </a:solidFill>
-              </a:rPr>
-              <a:t>メモリリークはフリーズの原因ともなる致命的な不具合です</a:t>
-            </a:r>
-            <a:endParaRPr lang="en-US" altLang="ja-JP" sz="2400" b="1" dirty="0">
-              <a:solidFill>
-                <a:srgbClr val="FF0000"/>
-              </a:solidFill>
-            </a:endParaRPr>
           </a:p>
         </p:txBody>
       </p:sp>
@@ -3868,7 +3793,7 @@
         <p:spPr>
           <a:xfrm>
             <a:off x="567542" y="491954"/>
-            <a:ext cx="3877985" cy="584775"/>
+            <a:ext cx="3057247" cy="584775"/>
           </a:xfrm>
           <a:prstGeom prst="rect">
             <a:avLst/>
@@ -3883,7 +3808,7 @@
           <a:p>
             <a:r>
               <a:rPr lang="ja-JP" altLang="en-US" sz="3200" b="1" u="sng" dirty="0"/>
-              <a:t>スマートポインター</a:t>
+              <a:t>マルチスレッド</a:t>
             </a:r>
             <a:endParaRPr kumimoji="1" lang="ja-JP" altLang="en-US" sz="3200" b="1" u="sng" dirty="0"/>
           </a:p>
@@ -3904,7 +3829,7 @@
         <p:spPr>
           <a:xfrm>
             <a:off x="567542" y="1216429"/>
-            <a:ext cx="9078126" cy="1938992"/>
+            <a:ext cx="10841429" cy="2677656"/>
           </a:xfrm>
           <a:prstGeom prst="rect">
             <a:avLst/>
@@ -3919,40 +3844,7 @@
           <a:p>
             <a:r>
               <a:rPr lang="ja-JP" altLang="en-US" sz="2400" dirty="0"/>
-              <a:t>関数を抜けると、ローカル変数である</a:t>
-            </a:r>
-            <a:r>
-              <a:rPr lang="en-US" altLang="ja-JP" sz="2400" dirty="0"/>
-              <a:t>player</a:t>
-            </a:r>
-            <a:r>
-              <a:rPr lang="ja-JP" altLang="en-US" sz="2400" dirty="0"/>
-              <a:t>は無くなります。</a:t>
-            </a:r>
-            <a:endParaRPr lang="en-US" altLang="ja-JP" sz="2400" dirty="0"/>
-          </a:p>
-          <a:p>
-            <a:r>
-              <a:rPr lang="ja-JP" altLang="en-US" sz="2400" dirty="0"/>
-              <a:t>これで</a:t>
-            </a:r>
-            <a:r>
-              <a:rPr lang="en-US" altLang="ja-JP" sz="2400" dirty="0"/>
-              <a:t>Player</a:t>
-            </a:r>
-            <a:r>
-              <a:rPr lang="ja-JP" altLang="en-US" sz="2400" dirty="0"/>
-              <a:t>の所有権を持つ変数がすべてなくなりました。</a:t>
-            </a:r>
-            <a:endParaRPr lang="en-US" altLang="ja-JP" sz="2400" dirty="0"/>
-          </a:p>
-          <a:p>
-            <a:endParaRPr lang="en-US" altLang="ja-JP" sz="2400" dirty="0"/>
-          </a:p>
-          <a:p>
-            <a:r>
-              <a:rPr lang="ja-JP" altLang="en-US" sz="2400" dirty="0"/>
-              <a:t>スマートポインターで生成したオブジェクトは、</a:t>
+              <a:t>マルチスレッドは複数の処理を同時に進行できるため、</a:t>
             </a:r>
             <a:endParaRPr lang="en-US" altLang="ja-JP" sz="2400" dirty="0"/>
           </a:p>
@@ -3963,97 +3855,58 @@
                   <a:srgbClr val="FF0000"/>
                 </a:solidFill>
               </a:rPr>
-              <a:t>所有権がなくなれば自動で</a:t>
-            </a:r>
-            <a:r>
-              <a:rPr lang="en-US" altLang="ja-JP" sz="2400" b="1" dirty="0">
-                <a:solidFill>
-                  <a:srgbClr val="FF0000"/>
-                </a:solidFill>
-              </a:rPr>
-              <a:t>delete</a:t>
-            </a:r>
+              <a:t>処理効率を格段に上げることができます。</a:t>
+            </a:r>
+            <a:endParaRPr lang="en-US" altLang="ja-JP" sz="2400" b="1" dirty="0">
+              <a:solidFill>
+                <a:srgbClr val="FF0000"/>
+              </a:solidFill>
+            </a:endParaRPr>
+          </a:p>
+          <a:p>
             <a:r>
               <a:rPr lang="ja-JP" altLang="en-US" sz="2400" dirty="0"/>
-              <a:t>されます。</a:t>
+              <a:t>実際、</a:t>
+            </a:r>
+            <a:r>
+              <a:rPr lang="en-US" altLang="ja-JP" sz="2400" dirty="0"/>
+              <a:t>AAA</a:t>
+            </a:r>
+            <a:r>
+              <a:rPr lang="ja-JP" altLang="en-US" sz="2400" dirty="0"/>
+              <a:t>タイトルでは</a:t>
+            </a:r>
+            <a:r>
+              <a:rPr lang="en-US" altLang="ja-JP" sz="2400" dirty="0"/>
+              <a:t>100</a:t>
+            </a:r>
+            <a:r>
+              <a:rPr lang="ja-JP" altLang="en-US" sz="2400" dirty="0"/>
+              <a:t>スレッド同時に動いているゲームもあるほど、</a:t>
             </a:r>
             <a:endParaRPr lang="en-US" altLang="ja-JP" sz="2400" dirty="0"/>
           </a:p>
-        </p:txBody>
-      </p:sp>
-      <p:pic>
-        <p:nvPicPr>
-          <p:cNvPr id="5" name="図 4">
-            <a:extLst>
-              <a:ext uri="{FF2B5EF4-FFF2-40B4-BE49-F238E27FC236}">
-                <a16:creationId xmlns:a16="http://schemas.microsoft.com/office/drawing/2014/main" id="{B3814176-4905-4AC9-BD15-7AE4EA39E5FB}"/>
-              </a:ext>
-            </a:extLst>
-          </p:cNvPr>
-          <p:cNvPicPr>
-            <a:picLocks noChangeAspect="1"/>
-          </p:cNvPicPr>
-          <p:nvPr/>
-        </p:nvPicPr>
-        <p:blipFill>
-          <a:blip r:embed="rId2"/>
-          <a:stretch>
-            <a:fillRect/>
-          </a:stretch>
-        </p:blipFill>
-        <p:spPr>
-          <a:xfrm>
-            <a:off x="567542" y="3295121"/>
-            <a:ext cx="9362131" cy="1088620"/>
-          </a:xfrm>
-          <a:prstGeom prst="rect">
-            <a:avLst/>
-          </a:prstGeom>
-        </p:spPr>
-      </p:pic>
-      <p:sp>
-        <p:nvSpPr>
-          <p:cNvPr id="8" name="テキスト ボックス 7">
-            <a:extLst>
-              <a:ext uri="{FF2B5EF4-FFF2-40B4-BE49-F238E27FC236}">
-                <a16:creationId xmlns:a16="http://schemas.microsoft.com/office/drawing/2014/main" id="{93C76CBA-B858-4AC5-9825-4ED7ADD359AC}"/>
-              </a:ext>
-            </a:extLst>
-          </p:cNvPr>
-          <p:cNvSpPr txBox="1"/>
-          <p:nvPr/>
-        </p:nvSpPr>
-        <p:spPr>
-          <a:xfrm>
-            <a:off x="567542" y="4523441"/>
-            <a:ext cx="10299614" cy="461665"/>
-          </a:xfrm>
-          <a:prstGeom prst="rect">
-            <a:avLst/>
-          </a:prstGeom>
-          <a:noFill/>
-        </p:spPr>
-        <p:txBody>
-          <a:bodyPr wrap="none" rtlCol="0">
-            <a:spAutoFit/>
-          </a:bodyPr>
-          <a:lstStyle/>
           <a:p>
             <a:r>
               <a:rPr lang="ja-JP" altLang="en-US" sz="2400" dirty="0"/>
-              <a:t>実際に</a:t>
-            </a:r>
-            <a:r>
-              <a:rPr lang="en-US" altLang="ja-JP" sz="2400" b="1" dirty="0">
-                <a:solidFill>
-                  <a:srgbClr val="0070C0"/>
-                </a:solidFill>
-              </a:rPr>
-              <a:t>delete</a:t>
-            </a:r>
+              <a:t>積極的に使われるものです。</a:t>
+            </a:r>
+            <a:endParaRPr lang="en-US" altLang="ja-JP" sz="2400" dirty="0"/>
+          </a:p>
+          <a:p>
+            <a:endParaRPr lang="en-US" altLang="ja-JP" sz="2400" dirty="0"/>
+          </a:p>
+          <a:p>
             <a:r>
               <a:rPr lang="ja-JP" altLang="en-US" sz="2400" dirty="0"/>
-              <a:t>は使ってないですが、</a:t>
+              <a:t>しかし、無計画に使用するとバグの温床となってしまいます。</a:t>
+            </a:r>
+            <a:endParaRPr lang="en-US" altLang="ja-JP" sz="2400" dirty="0"/>
+          </a:p>
+          <a:p>
+            <a:r>
+              <a:rPr lang="ja-JP" altLang="en-US" sz="2400" dirty="0"/>
+              <a:t>使用する際は</a:t>
             </a:r>
             <a:r>
               <a:rPr lang="ja-JP" altLang="en-US" sz="2400" b="1" dirty="0">
@@ -4061,11 +3914,11 @@
                   <a:srgbClr val="FF0000"/>
                 </a:solidFill>
               </a:rPr>
-              <a:t>デストラクタが呼ばれている</a:t>
+              <a:t>処理順に十分な配慮</a:t>
             </a:r>
             <a:r>
               <a:rPr lang="ja-JP" altLang="en-US" sz="2400" dirty="0"/>
-              <a:t>はずです</a:t>
+              <a:t>をして、慎重に使っていきましょう。</a:t>
             </a:r>
             <a:endParaRPr lang="en-US" altLang="ja-JP" sz="2400" dirty="0"/>
           </a:p>
@@ -4074,7 +3927,7 @@
     </p:spTree>
     <p:extLst>
       <p:ext uri="{BB962C8B-B14F-4D97-AF65-F5344CB8AC3E}">
-        <p14:creationId xmlns:p14="http://schemas.microsoft.com/office/powerpoint/2010/main" val="4158749681"/>
+        <p14:creationId xmlns:p14="http://schemas.microsoft.com/office/powerpoint/2010/main" val="1560157250"/>
       </p:ext>
     </p:extLst>
   </p:cSld>
@@ -4116,7 +3969,7 @@
         <p:spPr>
           <a:xfrm>
             <a:off x="567542" y="491954"/>
-            <a:ext cx="3877985" cy="584775"/>
+            <a:ext cx="4405373" cy="584775"/>
           </a:xfrm>
           <a:prstGeom prst="rect">
             <a:avLst/>
@@ -4131,7 +3984,7 @@
           <a:p>
             <a:r>
               <a:rPr lang="ja-JP" altLang="en-US" sz="3200" b="1" u="sng" dirty="0"/>
-              <a:t>スマートポインター</a:t>
+              <a:t>マルチスレッド おまけ</a:t>
             </a:r>
             <a:endParaRPr kumimoji="1" lang="ja-JP" altLang="en-US" sz="3200" b="1" u="sng" dirty="0"/>
           </a:p>
@@ -4152,7 +4005,7 @@
         <p:spPr>
           <a:xfrm>
             <a:off x="567542" y="1216429"/>
-            <a:ext cx="4267515" cy="461665"/>
+            <a:ext cx="9834744" cy="461665"/>
           </a:xfrm>
           <a:prstGeom prst="rect">
             <a:avLst/>
@@ -4166,16 +4019,24 @@
           <a:lstStyle/>
           <a:p>
             <a:r>
+              <a:rPr lang="en-US" altLang="ja-JP" sz="2400" b="1" dirty="0" err="1">
+                <a:solidFill>
+                  <a:srgbClr val="0070C0"/>
+                </a:solidFill>
+              </a:rPr>
+              <a:t>sleep_for</a:t>
+            </a:r>
+            <a:r>
+              <a:rPr lang="ja-JP" altLang="en-US" sz="2400" b="1" dirty="0">
+                <a:solidFill>
+                  <a:srgbClr val="0070C0"/>
+                </a:solidFill>
+              </a:rPr>
+              <a:t>関数</a:t>
+            </a:r>
+            <a:r>
               <a:rPr lang="ja-JP" altLang="en-US" sz="2400" dirty="0"/>
-              <a:t>続いて</a:t>
-            </a:r>
-            <a:r>
-              <a:rPr lang="en-US" altLang="ja-JP" sz="2400" dirty="0"/>
-              <a:t>Shared</a:t>
-            </a:r>
-            <a:r>
-              <a:rPr lang="ja-JP" altLang="en-US" sz="2400" dirty="0"/>
-              <a:t>を練習します。</a:t>
+              <a:t>を使えば、スレッドを一定時間止めることができます。</a:t>
             </a:r>
             <a:endParaRPr lang="en-US" altLang="ja-JP" sz="2400" dirty="0"/>
           </a:p>
@@ -4186,7 +4047,7 @@
           <p:cNvPr id="3" name="図 2">
             <a:extLst>
               <a:ext uri="{FF2B5EF4-FFF2-40B4-BE49-F238E27FC236}">
-                <a16:creationId xmlns:a16="http://schemas.microsoft.com/office/drawing/2014/main" id="{327D281B-E888-48FE-AA5B-61D92E77C303}"/>
+                <a16:creationId xmlns:a16="http://schemas.microsoft.com/office/drawing/2014/main" id="{614F7569-471E-4305-9462-A2B8383DE6B8}"/>
               </a:ext>
             </a:extLst>
           </p:cNvPr>
@@ -4204,49 +4065,19 @@
         <p:spPr>
           <a:xfrm>
             <a:off x="567542" y="1817794"/>
-            <a:ext cx="7716327" cy="4048690"/>
+            <a:ext cx="3614991" cy="2808167"/>
           </a:xfrm>
           <a:prstGeom prst="rect">
             <a:avLst/>
           </a:prstGeom>
         </p:spPr>
       </p:pic>
-    </p:spTree>
-    <p:extLst>
-      <p:ext uri="{BB962C8B-B14F-4D97-AF65-F5344CB8AC3E}">
-        <p14:creationId xmlns:p14="http://schemas.microsoft.com/office/powerpoint/2010/main" val="2962186904"/>
-      </p:ext>
-    </p:extLst>
-  </p:cSld>
-  <p:clrMapOvr>
-    <a:masterClrMapping/>
-  </p:clrMapOvr>
-</p:sld>
-</file>
-
-<file path=ppt/slides/slide12.xml><?xml version="1.0" encoding="utf-8"?>
-<p:sld xmlns:a="http://schemas.openxmlformats.org/drawingml/2006/main" xmlns:r="http://schemas.openxmlformats.org/officeDocument/2006/relationships" xmlns:p="http://schemas.openxmlformats.org/presentationml/2006/main">
-  <p:cSld>
-    <p:spTree>
-      <p:nvGrpSpPr>
-        <p:cNvPr id="1" name=""/>
-        <p:cNvGrpSpPr/>
-        <p:nvPr/>
-      </p:nvGrpSpPr>
-      <p:grpSpPr>
-        <a:xfrm>
-          <a:off x="0" y="0"/>
-          <a:ext cx="0" cy="0"/>
-          <a:chOff x="0" y="0"/>
-          <a:chExt cx="0" cy="0"/>
-        </a:xfrm>
-      </p:grpSpPr>
-      <p:sp>
-        <p:nvSpPr>
-          <p:cNvPr id="4" name="テキスト ボックス 3">
-            <a:extLst>
-              <a:ext uri="{FF2B5EF4-FFF2-40B4-BE49-F238E27FC236}">
-                <a16:creationId xmlns:a16="http://schemas.microsoft.com/office/drawing/2014/main" id="{5A13BF46-B8C5-48AA-8308-C9ECFF431A18}"/>
+      <p:sp>
+        <p:nvSpPr>
+          <p:cNvPr id="7" name="テキスト ボックス 6">
+            <a:extLst>
+              <a:ext uri="{FF2B5EF4-FFF2-40B4-BE49-F238E27FC236}">
+                <a16:creationId xmlns:a16="http://schemas.microsoft.com/office/drawing/2014/main" id="{AED97895-CDDB-4882-8F3E-17262B2A3DE8}"/>
               </a:ext>
             </a:extLst>
           </p:cNvPr>
@@ -4255,8 +4086,8 @@
         </p:nvSpPr>
         <p:spPr>
           <a:xfrm>
-            <a:off x="567542" y="491954"/>
-            <a:ext cx="3877985" cy="584775"/>
+            <a:off x="567542" y="4765661"/>
+            <a:ext cx="9490098" cy="1569660"/>
           </a:xfrm>
           <a:prstGeom prst="rect">
             <a:avLst/>
@@ -4270,474 +4101,37 @@
           <a:lstStyle/>
           <a:p>
             <a:r>
-              <a:rPr lang="ja-JP" altLang="en-US" sz="3200" b="1" u="sng" dirty="0"/>
-              <a:t>スマートポインター</a:t>
-            </a:r>
-            <a:endParaRPr kumimoji="1" lang="ja-JP" altLang="en-US" sz="3200" b="1" u="sng" dirty="0"/>
-          </a:p>
-        </p:txBody>
-      </p:sp>
-      <p:sp>
-        <p:nvSpPr>
-          <p:cNvPr id="6" name="テキスト ボックス 5">
-            <a:extLst>
-              <a:ext uri="{FF2B5EF4-FFF2-40B4-BE49-F238E27FC236}">
-                <a16:creationId xmlns:a16="http://schemas.microsoft.com/office/drawing/2014/main" id="{55830AD6-028B-4C4E-80BF-B70DFC1C3A46}"/>
-              </a:ext>
-            </a:extLst>
-          </p:cNvPr>
-          <p:cNvSpPr txBox="1"/>
-          <p:nvPr/>
-        </p:nvSpPr>
-        <p:spPr>
-          <a:xfrm>
-            <a:off x="567542" y="1216429"/>
-            <a:ext cx="9241632" cy="830997"/>
-          </a:xfrm>
-          <a:prstGeom prst="rect">
-            <a:avLst/>
-          </a:prstGeom>
-          <a:noFill/>
-        </p:spPr>
-        <p:txBody>
-          <a:bodyPr wrap="none" rtlCol="0">
-            <a:spAutoFit/>
-          </a:bodyPr>
-          <a:lstStyle/>
-          <a:p>
-            <a:r>
-              <a:rPr lang="en-US" altLang="ja-JP" sz="2400" dirty="0"/>
-              <a:t>Shared</a:t>
-            </a:r>
-            <a:r>
               <a:rPr lang="ja-JP" altLang="en-US" sz="2400" dirty="0"/>
-              <a:t>は所有権を複数の変数に持たせることができます。</a:t>
+              <a:t>主に動作確認や処理負荷の軽減に使われたりします。</a:t>
             </a:r>
             <a:endParaRPr lang="en-US" altLang="ja-JP" sz="2400" dirty="0"/>
           </a:p>
           <a:p>
-            <a:r>
-              <a:rPr lang="ja-JP" altLang="en-US" sz="2400" dirty="0"/>
-              <a:t>サンプルでは</a:t>
-            </a:r>
-            <a:r>
-              <a:rPr lang="en-US" altLang="ja-JP" sz="2400" b="1" dirty="0" err="1"/>
-              <a:t>g_SharedPlayer</a:t>
-            </a:r>
-            <a:r>
-              <a:rPr lang="ja-JP" altLang="en-US" sz="2400" dirty="0"/>
-              <a:t>と</a:t>
-            </a:r>
-            <a:r>
-              <a:rPr lang="en-US" altLang="ja-JP" sz="2400" b="1" dirty="0"/>
-              <a:t>player</a:t>
-            </a:r>
-            <a:r>
-              <a:rPr lang="ja-JP" altLang="en-US" sz="2400" dirty="0"/>
-              <a:t>が所有権を持っています。</a:t>
-            </a:r>
             <a:endParaRPr lang="en-US" altLang="ja-JP" sz="2400" dirty="0"/>
           </a:p>
-        </p:txBody>
-      </p:sp>
-      <p:pic>
-        <p:nvPicPr>
-          <p:cNvPr id="3" name="図 2">
-            <a:extLst>
-              <a:ext uri="{FF2B5EF4-FFF2-40B4-BE49-F238E27FC236}">
-                <a16:creationId xmlns:a16="http://schemas.microsoft.com/office/drawing/2014/main" id="{FAF5F6E7-704C-48F5-84C1-FB212484CCBE}"/>
-              </a:ext>
-            </a:extLst>
-          </p:cNvPr>
-          <p:cNvPicPr>
-            <a:picLocks noChangeAspect="1"/>
-          </p:cNvPicPr>
-          <p:nvPr/>
-        </p:nvPicPr>
-        <p:blipFill>
-          <a:blip r:embed="rId2"/>
-          <a:stretch>
-            <a:fillRect/>
-          </a:stretch>
-        </p:blipFill>
-        <p:spPr>
-          <a:xfrm>
-            <a:off x="567542" y="2142946"/>
-            <a:ext cx="6363588" cy="1286054"/>
-          </a:xfrm>
-          <a:prstGeom prst="rect">
-            <a:avLst/>
-          </a:prstGeom>
-        </p:spPr>
-      </p:pic>
-      <p:sp>
-        <p:nvSpPr>
-          <p:cNvPr id="5" name="正方形/長方形 4">
-            <a:extLst>
-              <a:ext uri="{FF2B5EF4-FFF2-40B4-BE49-F238E27FC236}">
-                <a16:creationId xmlns:a16="http://schemas.microsoft.com/office/drawing/2014/main" id="{B0EA7371-58E6-49A4-9583-2A15D87651DE}"/>
-              </a:ext>
-            </a:extLst>
-          </p:cNvPr>
-          <p:cNvSpPr/>
-          <p:nvPr/>
-        </p:nvSpPr>
-        <p:spPr>
-          <a:xfrm>
-            <a:off x="567542" y="3730422"/>
-            <a:ext cx="2026024" cy="2635624"/>
-          </a:xfrm>
-          <a:prstGeom prst="rect">
-            <a:avLst/>
-          </a:prstGeom>
-        </p:spPr>
-        <p:style>
-          <a:lnRef idx="2">
-            <a:schemeClr val="accent1">
-              <a:shade val="50000"/>
-            </a:schemeClr>
-          </a:lnRef>
-          <a:fillRef idx="1">
-            <a:schemeClr val="accent1"/>
-          </a:fillRef>
-          <a:effectRef idx="0">
-            <a:schemeClr val="accent1"/>
-          </a:effectRef>
-          <a:fontRef idx="minor">
-            <a:schemeClr val="lt1"/>
-          </a:fontRef>
-        </p:style>
-        <p:txBody>
-          <a:bodyPr rtlCol="0" anchor="ctr"/>
-          <a:lstStyle/>
-          <a:p>
-            <a:pPr algn="ctr"/>
-            <a:r>
-              <a:rPr kumimoji="1" lang="en-US" altLang="ja-JP" dirty="0"/>
-              <a:t>Player</a:t>
-            </a:r>
-            <a:endParaRPr kumimoji="1" lang="ja-JP" altLang="en-US" dirty="0"/>
-          </a:p>
-        </p:txBody>
-      </p:sp>
-      <p:sp>
-        <p:nvSpPr>
-          <p:cNvPr id="9" name="スクロール: 縦 8">
-            <a:extLst>
-              <a:ext uri="{FF2B5EF4-FFF2-40B4-BE49-F238E27FC236}">
-                <a16:creationId xmlns:a16="http://schemas.microsoft.com/office/drawing/2014/main" id="{092CDC6E-92CB-41F0-A98C-E89F7C1E99A8}"/>
-              </a:ext>
-            </a:extLst>
-          </p:cNvPr>
-          <p:cNvSpPr/>
-          <p:nvPr/>
-        </p:nvSpPr>
-        <p:spPr>
-          <a:xfrm>
-            <a:off x="3953934" y="3330182"/>
-            <a:ext cx="1210733" cy="1329266"/>
-          </a:xfrm>
-          <a:prstGeom prst="verticalScroll">
-            <a:avLst/>
-          </a:prstGeom>
-        </p:spPr>
-        <p:style>
-          <a:lnRef idx="2">
-            <a:schemeClr val="accent3">
-              <a:shade val="50000"/>
-            </a:schemeClr>
-          </a:lnRef>
-          <a:fillRef idx="1">
-            <a:schemeClr val="accent3"/>
-          </a:fillRef>
-          <a:effectRef idx="0">
-            <a:schemeClr val="accent3"/>
-          </a:effectRef>
-          <a:fontRef idx="minor">
-            <a:schemeClr val="lt1"/>
-          </a:fontRef>
-        </p:style>
-        <p:txBody>
-          <a:bodyPr rtlCol="0" anchor="ctr"/>
-          <a:lstStyle/>
-          <a:p>
-            <a:pPr algn="ctr"/>
-            <a:r>
-              <a:rPr kumimoji="1" lang="en-US" altLang="ja-JP" b="1" dirty="0"/>
-              <a:t>Player</a:t>
-            </a:r>
-            <a:r>
-              <a:rPr kumimoji="1" lang="ja-JP" altLang="en-US" b="1" dirty="0"/>
-              <a:t>所有権</a:t>
-            </a:r>
-          </a:p>
-        </p:txBody>
-      </p:sp>
-      <p:sp>
-        <p:nvSpPr>
-          <p:cNvPr id="10" name="フローチャート: 代替処理 9">
-            <a:extLst>
-              <a:ext uri="{FF2B5EF4-FFF2-40B4-BE49-F238E27FC236}">
-                <a16:creationId xmlns:a16="http://schemas.microsoft.com/office/drawing/2014/main" id="{74555550-CF5D-435A-8B72-0A59DF1011AC}"/>
-              </a:ext>
-            </a:extLst>
-          </p:cNvPr>
-          <p:cNvSpPr/>
-          <p:nvPr/>
-        </p:nvSpPr>
-        <p:spPr>
-          <a:xfrm>
-            <a:off x="4783667" y="4350415"/>
-            <a:ext cx="2489200" cy="537634"/>
-          </a:xfrm>
-          <a:prstGeom prst="flowChartAlternateProcess">
-            <a:avLst/>
-          </a:prstGeom>
-        </p:spPr>
-        <p:style>
-          <a:lnRef idx="2">
-            <a:schemeClr val="accent4">
-              <a:shade val="50000"/>
-            </a:schemeClr>
-          </a:lnRef>
-          <a:fillRef idx="1">
-            <a:schemeClr val="accent4"/>
-          </a:fillRef>
-          <a:effectRef idx="0">
-            <a:schemeClr val="accent4"/>
-          </a:effectRef>
-          <a:fontRef idx="minor">
-            <a:schemeClr val="lt1"/>
-          </a:fontRef>
-        </p:style>
-        <p:txBody>
-          <a:bodyPr rtlCol="0" anchor="ctr"/>
-          <a:lstStyle/>
-          <a:p>
-            <a:pPr algn="ctr"/>
-            <a:r>
-              <a:rPr kumimoji="1" lang="en-US" altLang="ja-JP" b="1" dirty="0"/>
-              <a:t>player</a:t>
-            </a:r>
-            <a:endParaRPr kumimoji="1" lang="ja-JP" altLang="en-US" b="1" dirty="0"/>
-          </a:p>
-        </p:txBody>
-      </p:sp>
-      <p:sp>
-        <p:nvSpPr>
-          <p:cNvPr id="11" name="スクロール: 縦 10">
-            <a:extLst>
-              <a:ext uri="{FF2B5EF4-FFF2-40B4-BE49-F238E27FC236}">
-                <a16:creationId xmlns:a16="http://schemas.microsoft.com/office/drawing/2014/main" id="{02BE6EC9-EB6E-4BED-852A-A79F7242BE1D}"/>
-              </a:ext>
-            </a:extLst>
-          </p:cNvPr>
-          <p:cNvSpPr/>
-          <p:nvPr/>
-        </p:nvSpPr>
-        <p:spPr>
-          <a:xfrm>
-            <a:off x="3953934" y="5076996"/>
-            <a:ext cx="1210733" cy="1329266"/>
-          </a:xfrm>
-          <a:prstGeom prst="verticalScroll">
-            <a:avLst/>
-          </a:prstGeom>
-        </p:spPr>
-        <p:style>
-          <a:lnRef idx="2">
-            <a:schemeClr val="accent3">
-              <a:shade val="50000"/>
-            </a:schemeClr>
-          </a:lnRef>
-          <a:fillRef idx="1">
-            <a:schemeClr val="accent3"/>
-          </a:fillRef>
-          <a:effectRef idx="0">
-            <a:schemeClr val="accent3"/>
-          </a:effectRef>
-          <a:fontRef idx="minor">
-            <a:schemeClr val="lt1"/>
-          </a:fontRef>
-        </p:style>
-        <p:txBody>
-          <a:bodyPr rtlCol="0" anchor="ctr"/>
-          <a:lstStyle/>
-          <a:p>
-            <a:pPr algn="ctr"/>
-            <a:r>
-              <a:rPr kumimoji="1" lang="en-US" altLang="ja-JP" b="1" dirty="0"/>
-              <a:t>Player</a:t>
-            </a:r>
-            <a:r>
-              <a:rPr kumimoji="1" lang="ja-JP" altLang="en-US" b="1" dirty="0"/>
-              <a:t>所有権</a:t>
-            </a:r>
-          </a:p>
-        </p:txBody>
-      </p:sp>
-      <p:sp>
-        <p:nvSpPr>
-          <p:cNvPr id="12" name="フローチャート: 代替処理 11">
-            <a:extLst>
-              <a:ext uri="{FF2B5EF4-FFF2-40B4-BE49-F238E27FC236}">
-                <a16:creationId xmlns:a16="http://schemas.microsoft.com/office/drawing/2014/main" id="{5C8A2E50-40B4-4038-A26F-747A18E49E44}"/>
-              </a:ext>
-            </a:extLst>
-          </p:cNvPr>
-          <p:cNvSpPr/>
-          <p:nvPr/>
-        </p:nvSpPr>
-        <p:spPr>
-          <a:xfrm>
-            <a:off x="4783667" y="6097229"/>
-            <a:ext cx="2489200" cy="537634"/>
-          </a:xfrm>
-          <a:prstGeom prst="flowChartAlternateProcess">
-            <a:avLst/>
-          </a:prstGeom>
-        </p:spPr>
-        <p:style>
-          <a:lnRef idx="2">
-            <a:schemeClr val="accent4">
-              <a:shade val="50000"/>
-            </a:schemeClr>
-          </a:lnRef>
-          <a:fillRef idx="1">
-            <a:schemeClr val="accent4"/>
-          </a:fillRef>
-          <a:effectRef idx="0">
-            <a:schemeClr val="accent4"/>
-          </a:effectRef>
-          <a:fontRef idx="minor">
-            <a:schemeClr val="lt1"/>
-          </a:fontRef>
-        </p:style>
-        <p:txBody>
-          <a:bodyPr rtlCol="0" anchor="ctr"/>
-          <a:lstStyle/>
-          <a:p>
-            <a:pPr algn="ctr"/>
-            <a:r>
-              <a:rPr kumimoji="1" lang="en-US" altLang="ja-JP" b="1" dirty="0" err="1"/>
-              <a:t>g_SharedPlayer</a:t>
-            </a:r>
-            <a:endParaRPr kumimoji="1" lang="ja-JP" altLang="en-US" b="1" dirty="0"/>
-          </a:p>
-        </p:txBody>
-      </p:sp>
-    </p:spTree>
-    <p:extLst>
-      <p:ext uri="{BB962C8B-B14F-4D97-AF65-F5344CB8AC3E}">
-        <p14:creationId xmlns:p14="http://schemas.microsoft.com/office/powerpoint/2010/main" val="1684229167"/>
-      </p:ext>
-    </p:extLst>
-  </p:cSld>
-  <p:clrMapOvr>
-    <a:masterClrMapping/>
-  </p:clrMapOvr>
-</p:sld>
-</file>
-
-<file path=ppt/slides/slide13.xml><?xml version="1.0" encoding="utf-8"?>
-<p:sld xmlns:a="http://schemas.openxmlformats.org/drawingml/2006/main" xmlns:r="http://schemas.openxmlformats.org/officeDocument/2006/relationships" xmlns:p="http://schemas.openxmlformats.org/presentationml/2006/main">
-  <p:cSld>
-    <p:spTree>
-      <p:nvGrpSpPr>
-        <p:cNvPr id="1" name=""/>
-        <p:cNvGrpSpPr/>
-        <p:nvPr/>
-      </p:nvGrpSpPr>
-      <p:grpSpPr>
-        <a:xfrm>
-          <a:off x="0" y="0"/>
-          <a:ext cx="0" cy="0"/>
-          <a:chOff x="0" y="0"/>
-          <a:chExt cx="0" cy="0"/>
-        </a:xfrm>
-      </p:grpSpPr>
-      <p:sp>
-        <p:nvSpPr>
-          <p:cNvPr id="4" name="テキスト ボックス 3">
-            <a:extLst>
-              <a:ext uri="{FF2B5EF4-FFF2-40B4-BE49-F238E27FC236}">
-                <a16:creationId xmlns:a16="http://schemas.microsoft.com/office/drawing/2014/main" id="{5A13BF46-B8C5-48AA-8308-C9ECFF431A18}"/>
-              </a:ext>
-            </a:extLst>
-          </p:cNvPr>
-          <p:cNvSpPr txBox="1"/>
-          <p:nvPr/>
-        </p:nvSpPr>
-        <p:spPr>
-          <a:xfrm>
-            <a:off x="567542" y="491954"/>
-            <a:ext cx="3877985" cy="584775"/>
-          </a:xfrm>
-          <a:prstGeom prst="rect">
-            <a:avLst/>
-          </a:prstGeom>
-          <a:noFill/>
-        </p:spPr>
-        <p:txBody>
-          <a:bodyPr wrap="none" rtlCol="0">
-            <a:spAutoFit/>
-          </a:bodyPr>
-          <a:lstStyle/>
-          <a:p>
-            <a:r>
-              <a:rPr lang="ja-JP" altLang="en-US" sz="3200" b="1" u="sng" dirty="0"/>
-              <a:t>スマートポインター</a:t>
-            </a:r>
-            <a:endParaRPr kumimoji="1" lang="ja-JP" altLang="en-US" sz="3200" b="1" u="sng" dirty="0"/>
-          </a:p>
-        </p:txBody>
-      </p:sp>
-      <p:sp>
-        <p:nvSpPr>
-          <p:cNvPr id="6" name="テキスト ボックス 5">
-            <a:extLst>
-              <a:ext uri="{FF2B5EF4-FFF2-40B4-BE49-F238E27FC236}">
-                <a16:creationId xmlns:a16="http://schemas.microsoft.com/office/drawing/2014/main" id="{55830AD6-028B-4C4E-80BF-B70DFC1C3A46}"/>
-              </a:ext>
-            </a:extLst>
-          </p:cNvPr>
-          <p:cNvSpPr txBox="1"/>
-          <p:nvPr/>
-        </p:nvSpPr>
-        <p:spPr>
-          <a:xfrm>
-            <a:off x="567542" y="1216429"/>
-            <a:ext cx="10530447" cy="830997"/>
-          </a:xfrm>
-          <a:prstGeom prst="rect">
-            <a:avLst/>
-          </a:prstGeom>
-          <a:noFill/>
-        </p:spPr>
-        <p:txBody>
-          <a:bodyPr wrap="none" rtlCol="0">
-            <a:spAutoFit/>
-          </a:bodyPr>
-          <a:lstStyle/>
-          <a:p>
-            <a:r>
-              <a:rPr lang="ja-JP" altLang="en-US" sz="2400" dirty="0"/>
-              <a:t>関数を抜けると</a:t>
-            </a:r>
-            <a:r>
-              <a:rPr lang="en-US" altLang="ja-JP" sz="2400" dirty="0"/>
-              <a:t>player</a:t>
-            </a:r>
-            <a:r>
-              <a:rPr lang="ja-JP" altLang="en-US" sz="2400" dirty="0"/>
-              <a:t>変数は無くなります。</a:t>
-            </a:r>
-            <a:endParaRPr lang="en-US" altLang="ja-JP" sz="2400" dirty="0"/>
-          </a:p>
-          <a:p>
-            <a:r>
-              <a:rPr lang="ja-JP" altLang="en-US" sz="2400" dirty="0"/>
-              <a:t>ただし、</a:t>
+          <a:p>
+            <a:r>
+              <a:rPr lang="ja-JP" altLang="en-US" sz="2400" b="1" dirty="0">
+                <a:solidFill>
+                  <a:srgbClr val="FF0000"/>
+                </a:solidFill>
+              </a:rPr>
+              <a:t>ただし、時限的な実装には使用しないようにしましょう。</a:t>
+            </a:r>
+            <a:endParaRPr lang="en-US" altLang="ja-JP" sz="2400" b="1" dirty="0">
+              <a:solidFill>
+                <a:srgbClr val="FF0000"/>
+              </a:solidFill>
+            </a:endParaRPr>
+          </a:p>
+          <a:p>
+            <a:r>
+              <a:rPr lang="ja-JP" altLang="en-US" sz="2400" b="1" dirty="0">
+                <a:solidFill>
+                  <a:srgbClr val="FF0000"/>
+                </a:solidFill>
+              </a:rPr>
+              <a:t>（５秒後にエフェクトが出るなどを</a:t>
             </a:r>
             <a:r>
               <a:rPr lang="en-US" altLang="ja-JP" sz="2400" b="1" dirty="0" err="1">
@@ -4745,7 +4139,7 @@
                   <a:srgbClr val="FF0000"/>
                 </a:solidFill>
               </a:rPr>
-              <a:t>g_SharedPlayer</a:t>
+              <a:t>sleep_for</a:t>
             </a:r>
             <a:r>
               <a:rPr lang="ja-JP" altLang="en-US" sz="2400" b="1" dirty="0">
@@ -4753,7 +4147,7 @@
                   <a:srgbClr val="FF0000"/>
                 </a:solidFill>
               </a:rPr>
-              <a:t>に所有権が残っているので自動削除されません。</a:t>
+              <a:t>でやってはだめ！！）</a:t>
             </a:r>
             <a:endParaRPr lang="en-US" altLang="ja-JP" sz="2400" b="1" dirty="0">
               <a:solidFill>
@@ -4763,1657 +4157,10 @@
           </a:p>
         </p:txBody>
       </p:sp>
-      <p:sp>
-        <p:nvSpPr>
-          <p:cNvPr id="5" name="正方形/長方形 4">
-            <a:extLst>
-              <a:ext uri="{FF2B5EF4-FFF2-40B4-BE49-F238E27FC236}">
-                <a16:creationId xmlns:a16="http://schemas.microsoft.com/office/drawing/2014/main" id="{B0EA7371-58E6-49A4-9583-2A15D87651DE}"/>
-              </a:ext>
-            </a:extLst>
-          </p:cNvPr>
-          <p:cNvSpPr/>
-          <p:nvPr/>
-        </p:nvSpPr>
-        <p:spPr>
-          <a:xfrm>
-            <a:off x="567542" y="3730422"/>
-            <a:ext cx="2026024" cy="2635624"/>
-          </a:xfrm>
-          <a:prstGeom prst="rect">
-            <a:avLst/>
-          </a:prstGeom>
-        </p:spPr>
-        <p:style>
-          <a:lnRef idx="2">
-            <a:schemeClr val="accent1">
-              <a:shade val="50000"/>
-            </a:schemeClr>
-          </a:lnRef>
-          <a:fillRef idx="1">
-            <a:schemeClr val="accent1"/>
-          </a:fillRef>
-          <a:effectRef idx="0">
-            <a:schemeClr val="accent1"/>
-          </a:effectRef>
-          <a:fontRef idx="minor">
-            <a:schemeClr val="lt1"/>
-          </a:fontRef>
-        </p:style>
-        <p:txBody>
-          <a:bodyPr rtlCol="0" anchor="ctr"/>
-          <a:lstStyle/>
-          <a:p>
-            <a:pPr algn="ctr"/>
-            <a:r>
-              <a:rPr kumimoji="1" lang="en-US" altLang="ja-JP" dirty="0"/>
-              <a:t>Player</a:t>
-            </a:r>
-            <a:endParaRPr kumimoji="1" lang="ja-JP" altLang="en-US" dirty="0"/>
-          </a:p>
-        </p:txBody>
-      </p:sp>
-      <p:pic>
-        <p:nvPicPr>
-          <p:cNvPr id="9" name="図 8">
-            <a:extLst>
-              <a:ext uri="{FF2B5EF4-FFF2-40B4-BE49-F238E27FC236}">
-                <a16:creationId xmlns:a16="http://schemas.microsoft.com/office/drawing/2014/main" id="{ACA86A39-9EC5-476B-A25F-731EF3074A15}"/>
-              </a:ext>
-            </a:extLst>
-          </p:cNvPr>
-          <p:cNvPicPr>
-            <a:picLocks noChangeAspect="1"/>
-          </p:cNvPicPr>
-          <p:nvPr/>
-        </p:nvPicPr>
-        <p:blipFill>
-          <a:blip r:embed="rId2"/>
-          <a:stretch>
-            <a:fillRect/>
-          </a:stretch>
-        </p:blipFill>
-        <p:spPr>
-          <a:xfrm>
-            <a:off x="567542" y="2187126"/>
-            <a:ext cx="7260287" cy="940452"/>
-          </a:xfrm>
-          <a:prstGeom prst="rect">
-            <a:avLst/>
-          </a:prstGeom>
-        </p:spPr>
-      </p:pic>
-      <p:sp>
-        <p:nvSpPr>
-          <p:cNvPr id="12" name="テキスト ボックス 11">
-            <a:extLst>
-              <a:ext uri="{FF2B5EF4-FFF2-40B4-BE49-F238E27FC236}">
-                <a16:creationId xmlns:a16="http://schemas.microsoft.com/office/drawing/2014/main" id="{DE8E4A33-B14B-4B1F-8488-988A4B9CE017}"/>
-              </a:ext>
-            </a:extLst>
-          </p:cNvPr>
-          <p:cNvSpPr txBox="1"/>
-          <p:nvPr/>
-        </p:nvSpPr>
-        <p:spPr>
-          <a:xfrm>
-            <a:off x="6968239" y="4915838"/>
-            <a:ext cx="4493538" cy="1569660"/>
-          </a:xfrm>
-          <a:prstGeom prst="rect">
-            <a:avLst/>
-          </a:prstGeom>
-          <a:noFill/>
-        </p:spPr>
-        <p:txBody>
-          <a:bodyPr wrap="none" rtlCol="0">
-            <a:spAutoFit/>
-          </a:bodyPr>
-          <a:lstStyle/>
-          <a:p>
-            <a:r>
-              <a:rPr lang="en-US" altLang="ja-JP" sz="2400" b="1" dirty="0">
-                <a:solidFill>
-                  <a:srgbClr val="00B050"/>
-                </a:solidFill>
-              </a:rPr>
-              <a:t>MEMO</a:t>
-            </a:r>
-          </a:p>
-          <a:p>
-            <a:r>
-              <a:rPr lang="ja-JP" altLang="en-US" sz="2400" dirty="0"/>
-              <a:t>スマートポインターは、</a:t>
-            </a:r>
-            <a:endParaRPr lang="en-US" altLang="ja-JP" sz="2400" dirty="0"/>
-          </a:p>
-          <a:p>
-            <a:r>
-              <a:rPr lang="ja-JP" altLang="en-US" sz="2400" dirty="0"/>
-              <a:t>全ての所有権がなくならないと</a:t>
-            </a:r>
-            <a:endParaRPr lang="en-US" altLang="ja-JP" sz="2400" dirty="0"/>
-          </a:p>
-          <a:p>
-            <a:r>
-              <a:rPr lang="ja-JP" altLang="en-US" sz="2400" dirty="0"/>
-              <a:t>自動削除されません</a:t>
-            </a:r>
-            <a:endParaRPr lang="en-US" altLang="ja-JP" sz="2400" dirty="0"/>
-          </a:p>
-        </p:txBody>
-      </p:sp>
-      <p:sp>
-        <p:nvSpPr>
-          <p:cNvPr id="10" name="スクロール: 縦 9">
-            <a:extLst>
-              <a:ext uri="{FF2B5EF4-FFF2-40B4-BE49-F238E27FC236}">
-                <a16:creationId xmlns:a16="http://schemas.microsoft.com/office/drawing/2014/main" id="{4B09212F-3E79-40B6-B48D-29012E7FF829}"/>
-              </a:ext>
-            </a:extLst>
-          </p:cNvPr>
-          <p:cNvSpPr/>
-          <p:nvPr/>
-        </p:nvSpPr>
-        <p:spPr>
-          <a:xfrm>
-            <a:off x="3151292" y="3127578"/>
-            <a:ext cx="1210733" cy="1329266"/>
-          </a:xfrm>
-          <a:prstGeom prst="verticalScroll">
-            <a:avLst/>
-          </a:prstGeom>
-          <a:noFill/>
-          <a:ln>
-            <a:prstDash val="dash"/>
-          </a:ln>
-        </p:spPr>
-        <p:style>
-          <a:lnRef idx="2">
-            <a:schemeClr val="accent3">
-              <a:shade val="50000"/>
-            </a:schemeClr>
-          </a:lnRef>
-          <a:fillRef idx="1">
-            <a:schemeClr val="accent3"/>
-          </a:fillRef>
-          <a:effectRef idx="0">
-            <a:schemeClr val="accent3"/>
-          </a:effectRef>
-          <a:fontRef idx="minor">
-            <a:schemeClr val="lt1"/>
-          </a:fontRef>
-        </p:style>
-        <p:txBody>
-          <a:bodyPr rtlCol="0" anchor="ctr"/>
-          <a:lstStyle/>
-          <a:p>
-            <a:pPr algn="ctr"/>
-            <a:endParaRPr kumimoji="1" lang="ja-JP" altLang="en-US" b="1" dirty="0"/>
-          </a:p>
-        </p:txBody>
-      </p:sp>
-      <p:sp>
-        <p:nvSpPr>
-          <p:cNvPr id="13" name="フローチャート: 代替処理 12">
-            <a:extLst>
-              <a:ext uri="{FF2B5EF4-FFF2-40B4-BE49-F238E27FC236}">
-                <a16:creationId xmlns:a16="http://schemas.microsoft.com/office/drawing/2014/main" id="{4DFBEA3F-54D2-4095-A724-FBBEE0179FDF}"/>
-              </a:ext>
-            </a:extLst>
-          </p:cNvPr>
-          <p:cNvSpPr/>
-          <p:nvPr/>
-        </p:nvSpPr>
-        <p:spPr>
-          <a:xfrm>
-            <a:off x="3981025" y="4147811"/>
-            <a:ext cx="2489200" cy="537634"/>
-          </a:xfrm>
-          <a:prstGeom prst="flowChartAlternateProcess">
-            <a:avLst/>
-          </a:prstGeom>
-          <a:noFill/>
-          <a:ln>
-            <a:prstDash val="dash"/>
-          </a:ln>
-        </p:spPr>
-        <p:style>
-          <a:lnRef idx="2">
-            <a:schemeClr val="accent4">
-              <a:shade val="50000"/>
-            </a:schemeClr>
-          </a:lnRef>
-          <a:fillRef idx="1">
-            <a:schemeClr val="accent4"/>
-          </a:fillRef>
-          <a:effectRef idx="0">
-            <a:schemeClr val="accent4"/>
-          </a:effectRef>
-          <a:fontRef idx="minor">
-            <a:schemeClr val="lt1"/>
-          </a:fontRef>
-        </p:style>
-        <p:txBody>
-          <a:bodyPr rtlCol="0" anchor="ctr"/>
-          <a:lstStyle/>
-          <a:p>
-            <a:pPr algn="ctr"/>
-            <a:endParaRPr kumimoji="1" lang="ja-JP" altLang="en-US" b="1" dirty="0"/>
-          </a:p>
-        </p:txBody>
-      </p:sp>
-      <p:sp>
-        <p:nvSpPr>
-          <p:cNvPr id="14" name="スクロール: 縦 13">
-            <a:extLst>
-              <a:ext uri="{FF2B5EF4-FFF2-40B4-BE49-F238E27FC236}">
-                <a16:creationId xmlns:a16="http://schemas.microsoft.com/office/drawing/2014/main" id="{057BFEA7-7787-4425-B351-009B7976175C}"/>
-              </a:ext>
-            </a:extLst>
-          </p:cNvPr>
-          <p:cNvSpPr/>
-          <p:nvPr/>
-        </p:nvSpPr>
-        <p:spPr>
-          <a:xfrm>
-            <a:off x="3151292" y="4874392"/>
-            <a:ext cx="1210733" cy="1329266"/>
-          </a:xfrm>
-          <a:prstGeom prst="verticalScroll">
-            <a:avLst/>
-          </a:prstGeom>
-        </p:spPr>
-        <p:style>
-          <a:lnRef idx="2">
-            <a:schemeClr val="accent3">
-              <a:shade val="50000"/>
-            </a:schemeClr>
-          </a:lnRef>
-          <a:fillRef idx="1">
-            <a:schemeClr val="accent3"/>
-          </a:fillRef>
-          <a:effectRef idx="0">
-            <a:schemeClr val="accent3"/>
-          </a:effectRef>
-          <a:fontRef idx="minor">
-            <a:schemeClr val="lt1"/>
-          </a:fontRef>
-        </p:style>
-        <p:txBody>
-          <a:bodyPr rtlCol="0" anchor="ctr"/>
-          <a:lstStyle/>
-          <a:p>
-            <a:pPr algn="ctr"/>
-            <a:r>
-              <a:rPr kumimoji="1" lang="en-US" altLang="ja-JP" b="1" dirty="0"/>
-              <a:t>Player</a:t>
-            </a:r>
-            <a:r>
-              <a:rPr kumimoji="1" lang="ja-JP" altLang="en-US" b="1" dirty="0"/>
-              <a:t>所有権</a:t>
-            </a:r>
-          </a:p>
-        </p:txBody>
-      </p:sp>
-      <p:sp>
-        <p:nvSpPr>
-          <p:cNvPr id="15" name="フローチャート: 代替処理 14">
-            <a:extLst>
-              <a:ext uri="{FF2B5EF4-FFF2-40B4-BE49-F238E27FC236}">
-                <a16:creationId xmlns:a16="http://schemas.microsoft.com/office/drawing/2014/main" id="{9F8914E6-1640-4225-9E23-E6DD7B91AC21}"/>
-              </a:ext>
-            </a:extLst>
-          </p:cNvPr>
-          <p:cNvSpPr/>
-          <p:nvPr/>
-        </p:nvSpPr>
-        <p:spPr>
-          <a:xfrm>
-            <a:off x="3981025" y="5894625"/>
-            <a:ext cx="2489200" cy="537634"/>
-          </a:xfrm>
-          <a:prstGeom prst="flowChartAlternateProcess">
-            <a:avLst/>
-          </a:prstGeom>
-        </p:spPr>
-        <p:style>
-          <a:lnRef idx="2">
-            <a:schemeClr val="accent4">
-              <a:shade val="50000"/>
-            </a:schemeClr>
-          </a:lnRef>
-          <a:fillRef idx="1">
-            <a:schemeClr val="accent4"/>
-          </a:fillRef>
-          <a:effectRef idx="0">
-            <a:schemeClr val="accent4"/>
-          </a:effectRef>
-          <a:fontRef idx="minor">
-            <a:schemeClr val="lt1"/>
-          </a:fontRef>
-        </p:style>
-        <p:txBody>
-          <a:bodyPr rtlCol="0" anchor="ctr"/>
-          <a:lstStyle/>
-          <a:p>
-            <a:pPr algn="ctr"/>
-            <a:r>
-              <a:rPr kumimoji="1" lang="en-US" altLang="ja-JP" b="1" dirty="0" err="1"/>
-              <a:t>g_SharedPlayer</a:t>
-            </a:r>
-            <a:endParaRPr kumimoji="1" lang="ja-JP" altLang="en-US" b="1" dirty="0"/>
-          </a:p>
-        </p:txBody>
-      </p:sp>
     </p:spTree>
     <p:extLst>
       <p:ext uri="{BB962C8B-B14F-4D97-AF65-F5344CB8AC3E}">
-        <p14:creationId xmlns:p14="http://schemas.microsoft.com/office/powerpoint/2010/main" val="3860169284"/>
-      </p:ext>
-    </p:extLst>
-  </p:cSld>
-  <p:clrMapOvr>
-    <a:masterClrMapping/>
-  </p:clrMapOvr>
-</p:sld>
-</file>
-
-<file path=ppt/slides/slide14.xml><?xml version="1.0" encoding="utf-8"?>
-<p:sld xmlns:a="http://schemas.openxmlformats.org/drawingml/2006/main" xmlns:r="http://schemas.openxmlformats.org/officeDocument/2006/relationships" xmlns:p="http://schemas.openxmlformats.org/presentationml/2006/main">
-  <p:cSld>
-    <p:spTree>
-      <p:nvGrpSpPr>
-        <p:cNvPr id="1" name=""/>
-        <p:cNvGrpSpPr/>
-        <p:nvPr/>
-      </p:nvGrpSpPr>
-      <p:grpSpPr>
-        <a:xfrm>
-          <a:off x="0" y="0"/>
-          <a:ext cx="0" cy="0"/>
-          <a:chOff x="0" y="0"/>
-          <a:chExt cx="0" cy="0"/>
-        </a:xfrm>
-      </p:grpSpPr>
-      <p:sp>
-        <p:nvSpPr>
-          <p:cNvPr id="4" name="テキスト ボックス 3">
-            <a:extLst>
-              <a:ext uri="{FF2B5EF4-FFF2-40B4-BE49-F238E27FC236}">
-                <a16:creationId xmlns:a16="http://schemas.microsoft.com/office/drawing/2014/main" id="{5A13BF46-B8C5-48AA-8308-C9ECFF431A18}"/>
-              </a:ext>
-            </a:extLst>
-          </p:cNvPr>
-          <p:cNvSpPr txBox="1"/>
-          <p:nvPr/>
-        </p:nvSpPr>
-        <p:spPr>
-          <a:xfrm>
-            <a:off x="567542" y="491954"/>
-            <a:ext cx="3877985" cy="584775"/>
-          </a:xfrm>
-          <a:prstGeom prst="rect">
-            <a:avLst/>
-          </a:prstGeom>
-          <a:noFill/>
-        </p:spPr>
-        <p:txBody>
-          <a:bodyPr wrap="none" rtlCol="0">
-            <a:spAutoFit/>
-          </a:bodyPr>
-          <a:lstStyle/>
-          <a:p>
-            <a:r>
-              <a:rPr lang="ja-JP" altLang="en-US" sz="3200" b="1" u="sng" dirty="0"/>
-              <a:t>スマートポインター</a:t>
-            </a:r>
-            <a:endParaRPr kumimoji="1" lang="ja-JP" altLang="en-US" sz="3200" b="1" u="sng" dirty="0"/>
-          </a:p>
-        </p:txBody>
-      </p:sp>
-      <p:sp>
-        <p:nvSpPr>
-          <p:cNvPr id="6" name="テキスト ボックス 5">
-            <a:extLst>
-              <a:ext uri="{FF2B5EF4-FFF2-40B4-BE49-F238E27FC236}">
-                <a16:creationId xmlns:a16="http://schemas.microsoft.com/office/drawing/2014/main" id="{55830AD6-028B-4C4E-80BF-B70DFC1C3A46}"/>
-              </a:ext>
-            </a:extLst>
-          </p:cNvPr>
-          <p:cNvSpPr txBox="1"/>
-          <p:nvPr/>
-        </p:nvSpPr>
-        <p:spPr>
-          <a:xfrm>
-            <a:off x="567542" y="1216429"/>
-            <a:ext cx="4055919" cy="461665"/>
-          </a:xfrm>
-          <a:prstGeom prst="rect">
-            <a:avLst/>
-          </a:prstGeom>
-          <a:noFill/>
-        </p:spPr>
-        <p:txBody>
-          <a:bodyPr wrap="none" rtlCol="0">
-            <a:spAutoFit/>
-          </a:bodyPr>
-          <a:lstStyle/>
-          <a:p>
-            <a:r>
-              <a:rPr lang="ja-JP" altLang="en-US" sz="2400" dirty="0"/>
-              <a:t>最後に</a:t>
-            </a:r>
-            <a:r>
-              <a:rPr lang="en-US" altLang="ja-JP" sz="2400" dirty="0"/>
-              <a:t>Weak</a:t>
-            </a:r>
-            <a:r>
-              <a:rPr lang="ja-JP" altLang="en-US" sz="2400" dirty="0"/>
-              <a:t>を練習します。</a:t>
-            </a:r>
-            <a:endParaRPr lang="en-US" altLang="ja-JP" sz="2400" b="1" dirty="0">
-              <a:solidFill>
-                <a:srgbClr val="FF0000"/>
-              </a:solidFill>
-            </a:endParaRPr>
-          </a:p>
-        </p:txBody>
-      </p:sp>
-      <p:pic>
-        <p:nvPicPr>
-          <p:cNvPr id="16" name="図 15">
-            <a:extLst>
-              <a:ext uri="{FF2B5EF4-FFF2-40B4-BE49-F238E27FC236}">
-                <a16:creationId xmlns:a16="http://schemas.microsoft.com/office/drawing/2014/main" id="{694347CA-F58A-46B2-8B86-15CA6C8E9A6D}"/>
-              </a:ext>
-            </a:extLst>
-          </p:cNvPr>
-          <p:cNvPicPr>
-            <a:picLocks noChangeAspect="1"/>
-          </p:cNvPicPr>
-          <p:nvPr/>
-        </p:nvPicPr>
-        <p:blipFill>
-          <a:blip r:embed="rId2"/>
-          <a:stretch>
-            <a:fillRect/>
-          </a:stretch>
-        </p:blipFill>
-        <p:spPr>
-          <a:xfrm>
-            <a:off x="567542" y="1817794"/>
-            <a:ext cx="4969908" cy="4726441"/>
-          </a:xfrm>
-          <a:prstGeom prst="rect">
-            <a:avLst/>
-          </a:prstGeom>
-        </p:spPr>
-      </p:pic>
-    </p:spTree>
-    <p:extLst>
-      <p:ext uri="{BB962C8B-B14F-4D97-AF65-F5344CB8AC3E}">
-        <p14:creationId xmlns:p14="http://schemas.microsoft.com/office/powerpoint/2010/main" val="31770608"/>
-      </p:ext>
-    </p:extLst>
-  </p:cSld>
-  <p:clrMapOvr>
-    <a:masterClrMapping/>
-  </p:clrMapOvr>
-</p:sld>
-</file>
-
-<file path=ppt/slides/slide15.xml><?xml version="1.0" encoding="utf-8"?>
-<p:sld xmlns:a="http://schemas.openxmlformats.org/drawingml/2006/main" xmlns:r="http://schemas.openxmlformats.org/officeDocument/2006/relationships" xmlns:p="http://schemas.openxmlformats.org/presentationml/2006/main">
-  <p:cSld>
-    <p:spTree>
-      <p:nvGrpSpPr>
-        <p:cNvPr id="1" name=""/>
-        <p:cNvGrpSpPr/>
-        <p:nvPr/>
-      </p:nvGrpSpPr>
-      <p:grpSpPr>
-        <a:xfrm>
-          <a:off x="0" y="0"/>
-          <a:ext cx="0" cy="0"/>
-          <a:chOff x="0" y="0"/>
-          <a:chExt cx="0" cy="0"/>
-        </a:xfrm>
-      </p:grpSpPr>
-      <p:sp>
-        <p:nvSpPr>
-          <p:cNvPr id="4" name="テキスト ボックス 3">
-            <a:extLst>
-              <a:ext uri="{FF2B5EF4-FFF2-40B4-BE49-F238E27FC236}">
-                <a16:creationId xmlns:a16="http://schemas.microsoft.com/office/drawing/2014/main" id="{5A13BF46-B8C5-48AA-8308-C9ECFF431A18}"/>
-              </a:ext>
-            </a:extLst>
-          </p:cNvPr>
-          <p:cNvSpPr txBox="1"/>
-          <p:nvPr/>
-        </p:nvSpPr>
-        <p:spPr>
-          <a:xfrm>
-            <a:off x="567542" y="491954"/>
-            <a:ext cx="3877985" cy="584775"/>
-          </a:xfrm>
-          <a:prstGeom prst="rect">
-            <a:avLst/>
-          </a:prstGeom>
-          <a:noFill/>
-        </p:spPr>
-        <p:txBody>
-          <a:bodyPr wrap="none" rtlCol="0">
-            <a:spAutoFit/>
-          </a:bodyPr>
-          <a:lstStyle/>
-          <a:p>
-            <a:r>
-              <a:rPr lang="ja-JP" altLang="en-US" sz="3200" b="1" u="sng" dirty="0"/>
-              <a:t>スマートポインター</a:t>
-            </a:r>
-            <a:endParaRPr kumimoji="1" lang="ja-JP" altLang="en-US" sz="3200" b="1" u="sng" dirty="0"/>
-          </a:p>
-        </p:txBody>
-      </p:sp>
-      <p:sp>
-        <p:nvSpPr>
-          <p:cNvPr id="6" name="テキスト ボックス 5">
-            <a:extLst>
-              <a:ext uri="{FF2B5EF4-FFF2-40B4-BE49-F238E27FC236}">
-                <a16:creationId xmlns:a16="http://schemas.microsoft.com/office/drawing/2014/main" id="{55830AD6-028B-4C4E-80BF-B70DFC1C3A46}"/>
-              </a:ext>
-            </a:extLst>
-          </p:cNvPr>
-          <p:cNvSpPr txBox="1"/>
-          <p:nvPr/>
-        </p:nvSpPr>
-        <p:spPr>
-          <a:xfrm>
-            <a:off x="567542" y="1216429"/>
-            <a:ext cx="9642383" cy="830997"/>
-          </a:xfrm>
-          <a:prstGeom prst="rect">
-            <a:avLst/>
-          </a:prstGeom>
-          <a:noFill/>
-        </p:spPr>
-        <p:txBody>
-          <a:bodyPr wrap="none" rtlCol="0">
-            <a:spAutoFit/>
-          </a:bodyPr>
-          <a:lstStyle/>
-          <a:p>
-            <a:r>
-              <a:rPr lang="en-US" altLang="ja-JP" sz="2400" b="1" dirty="0">
-                <a:solidFill>
-                  <a:srgbClr val="00B050"/>
-                </a:solidFill>
-              </a:rPr>
-              <a:t>Weak</a:t>
-            </a:r>
-            <a:r>
-              <a:rPr lang="ja-JP" altLang="en-US" sz="2400" dirty="0"/>
-              <a:t>は</a:t>
-            </a:r>
-            <a:r>
-              <a:rPr lang="en-US" altLang="ja-JP" sz="2400" b="1" dirty="0">
-                <a:solidFill>
-                  <a:srgbClr val="FF0000"/>
-                </a:solidFill>
-              </a:rPr>
-              <a:t>Shared</a:t>
-            </a:r>
-            <a:r>
-              <a:rPr lang="ja-JP" altLang="en-US" sz="2400" b="1" dirty="0">
-                <a:solidFill>
-                  <a:srgbClr val="FF0000"/>
-                </a:solidFill>
-              </a:rPr>
-              <a:t>一時参照用のポインター</a:t>
-            </a:r>
-            <a:r>
-              <a:rPr lang="ja-JP" altLang="en-US" sz="2400" dirty="0"/>
-              <a:t>です。</a:t>
-            </a:r>
-            <a:endParaRPr lang="en-US" altLang="ja-JP" sz="2400" dirty="0"/>
-          </a:p>
-          <a:p>
-            <a:r>
-              <a:rPr lang="ja-JP" altLang="en-US" sz="2400" b="1" dirty="0">
-                <a:solidFill>
-                  <a:srgbClr val="FF0000"/>
-                </a:solidFill>
-              </a:rPr>
-              <a:t>参照機能のみで所有権は持ちません。</a:t>
-            </a:r>
-            <a:r>
-              <a:rPr lang="en-US" altLang="ja-JP" sz="2400" b="1" dirty="0" err="1">
-                <a:solidFill>
-                  <a:srgbClr val="FF0000"/>
-                </a:solidFill>
-              </a:rPr>
-              <a:t>make_weak</a:t>
-            </a:r>
-            <a:r>
-              <a:rPr lang="ja-JP" altLang="en-US" sz="2400" b="1" dirty="0">
-                <a:solidFill>
-                  <a:srgbClr val="FF0000"/>
-                </a:solidFill>
-              </a:rPr>
-              <a:t>関数もありません</a:t>
-            </a:r>
-            <a:endParaRPr lang="en-US" altLang="ja-JP" sz="2400" b="1" dirty="0">
-              <a:solidFill>
-                <a:srgbClr val="FF0000"/>
-              </a:solidFill>
-            </a:endParaRPr>
-          </a:p>
-        </p:txBody>
-      </p:sp>
-      <p:pic>
-        <p:nvPicPr>
-          <p:cNvPr id="5" name="図 4">
-            <a:extLst>
-              <a:ext uri="{FF2B5EF4-FFF2-40B4-BE49-F238E27FC236}">
-                <a16:creationId xmlns:a16="http://schemas.microsoft.com/office/drawing/2014/main" id="{A41D3E00-AC55-4B31-A03D-472D9CA46D58}"/>
-              </a:ext>
-            </a:extLst>
-          </p:cNvPr>
-          <p:cNvPicPr>
-            <a:picLocks noChangeAspect="1"/>
-          </p:cNvPicPr>
-          <p:nvPr/>
-        </p:nvPicPr>
-        <p:blipFill>
-          <a:blip r:embed="rId2"/>
-          <a:stretch>
-            <a:fillRect/>
-          </a:stretch>
-        </p:blipFill>
-        <p:spPr>
-          <a:xfrm>
-            <a:off x="567542" y="2187126"/>
-            <a:ext cx="9835496" cy="3236521"/>
-          </a:xfrm>
-          <a:prstGeom prst="rect">
-            <a:avLst/>
-          </a:prstGeom>
-        </p:spPr>
-      </p:pic>
-    </p:spTree>
-    <p:extLst>
-      <p:ext uri="{BB962C8B-B14F-4D97-AF65-F5344CB8AC3E}">
-        <p14:creationId xmlns:p14="http://schemas.microsoft.com/office/powerpoint/2010/main" val="114021735"/>
-      </p:ext>
-    </p:extLst>
-  </p:cSld>
-  <p:clrMapOvr>
-    <a:masterClrMapping/>
-  </p:clrMapOvr>
-</p:sld>
-</file>
-
-<file path=ppt/slides/slide16.xml><?xml version="1.0" encoding="utf-8"?>
-<p:sld xmlns:a="http://schemas.openxmlformats.org/drawingml/2006/main" xmlns:r="http://schemas.openxmlformats.org/officeDocument/2006/relationships" xmlns:p="http://schemas.openxmlformats.org/presentationml/2006/main">
-  <p:cSld>
-    <p:spTree>
-      <p:nvGrpSpPr>
-        <p:cNvPr id="1" name=""/>
-        <p:cNvGrpSpPr/>
-        <p:nvPr/>
-      </p:nvGrpSpPr>
-      <p:grpSpPr>
-        <a:xfrm>
-          <a:off x="0" y="0"/>
-          <a:ext cx="0" cy="0"/>
-          <a:chOff x="0" y="0"/>
-          <a:chExt cx="0" cy="0"/>
-        </a:xfrm>
-      </p:grpSpPr>
-      <p:sp>
-        <p:nvSpPr>
-          <p:cNvPr id="4" name="テキスト ボックス 3">
-            <a:extLst>
-              <a:ext uri="{FF2B5EF4-FFF2-40B4-BE49-F238E27FC236}">
-                <a16:creationId xmlns:a16="http://schemas.microsoft.com/office/drawing/2014/main" id="{5A13BF46-B8C5-48AA-8308-C9ECFF431A18}"/>
-              </a:ext>
-            </a:extLst>
-          </p:cNvPr>
-          <p:cNvSpPr txBox="1"/>
-          <p:nvPr/>
-        </p:nvSpPr>
-        <p:spPr>
-          <a:xfrm>
-            <a:off x="567542" y="491954"/>
-            <a:ext cx="3877985" cy="584775"/>
-          </a:xfrm>
-          <a:prstGeom prst="rect">
-            <a:avLst/>
-          </a:prstGeom>
-          <a:noFill/>
-        </p:spPr>
-        <p:txBody>
-          <a:bodyPr wrap="none" rtlCol="0">
-            <a:spAutoFit/>
-          </a:bodyPr>
-          <a:lstStyle/>
-          <a:p>
-            <a:r>
-              <a:rPr lang="ja-JP" altLang="en-US" sz="3200" b="1" u="sng" dirty="0"/>
-              <a:t>スマートポインター</a:t>
-            </a:r>
-            <a:endParaRPr kumimoji="1" lang="ja-JP" altLang="en-US" sz="3200" b="1" u="sng" dirty="0"/>
-          </a:p>
-        </p:txBody>
-      </p:sp>
-      <p:sp>
-        <p:nvSpPr>
-          <p:cNvPr id="6" name="テキスト ボックス 5">
-            <a:extLst>
-              <a:ext uri="{FF2B5EF4-FFF2-40B4-BE49-F238E27FC236}">
-                <a16:creationId xmlns:a16="http://schemas.microsoft.com/office/drawing/2014/main" id="{55830AD6-028B-4C4E-80BF-B70DFC1C3A46}"/>
-              </a:ext>
-            </a:extLst>
-          </p:cNvPr>
-          <p:cNvSpPr txBox="1"/>
-          <p:nvPr/>
-        </p:nvSpPr>
-        <p:spPr>
-          <a:xfrm>
-            <a:off x="567542" y="1216429"/>
-            <a:ext cx="10352514" cy="1569660"/>
-          </a:xfrm>
-          <a:prstGeom prst="rect">
-            <a:avLst/>
-          </a:prstGeom>
-          <a:noFill/>
-        </p:spPr>
-        <p:txBody>
-          <a:bodyPr wrap="none" rtlCol="0">
-            <a:spAutoFit/>
-          </a:bodyPr>
-          <a:lstStyle/>
-          <a:p>
-            <a:r>
-              <a:rPr lang="en-US" altLang="ja-JP" sz="2400" dirty="0"/>
-              <a:t>Weak</a:t>
-            </a:r>
-            <a:r>
-              <a:rPr lang="ja-JP" altLang="en-US" sz="2400" dirty="0"/>
-              <a:t>ポインターの</a:t>
-            </a:r>
-            <a:r>
-              <a:rPr lang="en-US" altLang="ja-JP" sz="2400" b="1" dirty="0">
-                <a:solidFill>
-                  <a:srgbClr val="0070C0"/>
-                </a:solidFill>
-              </a:rPr>
-              <a:t>lock</a:t>
-            </a:r>
-            <a:r>
-              <a:rPr lang="ja-JP" altLang="en-US" sz="2400" b="1" dirty="0">
-                <a:solidFill>
-                  <a:srgbClr val="0070C0"/>
-                </a:solidFill>
-              </a:rPr>
-              <a:t>関数</a:t>
-            </a:r>
-            <a:r>
-              <a:rPr lang="ja-JP" altLang="en-US" sz="2400" dirty="0"/>
-              <a:t>は</a:t>
-            </a:r>
-            <a:r>
-              <a:rPr lang="ja-JP" altLang="en-US" sz="2400" b="1" dirty="0">
-                <a:solidFill>
-                  <a:srgbClr val="FF0000"/>
-                </a:solidFill>
-              </a:rPr>
-              <a:t>参照している</a:t>
-            </a:r>
-            <a:r>
-              <a:rPr lang="en-US" altLang="ja-JP" sz="2400" b="1" dirty="0">
-                <a:solidFill>
-                  <a:srgbClr val="FF0000"/>
-                </a:solidFill>
-              </a:rPr>
-              <a:t>Shared</a:t>
-            </a:r>
-            <a:r>
-              <a:rPr lang="ja-JP" altLang="en-US" sz="2400" b="1" dirty="0">
-                <a:solidFill>
-                  <a:srgbClr val="FF0000"/>
-                </a:solidFill>
-              </a:rPr>
-              <a:t>を返却する関数</a:t>
-            </a:r>
-            <a:r>
-              <a:rPr lang="ja-JP" altLang="en-US" sz="2400" dirty="0"/>
-              <a:t>です。</a:t>
-            </a:r>
-            <a:endParaRPr lang="en-US" altLang="ja-JP" sz="2400" dirty="0"/>
-          </a:p>
-          <a:p>
-            <a:r>
-              <a:rPr lang="en-US" altLang="ja-JP" sz="2400" b="1" dirty="0">
-                <a:solidFill>
-                  <a:srgbClr val="FF0000"/>
-                </a:solidFill>
-              </a:rPr>
-              <a:t>Shared</a:t>
-            </a:r>
-            <a:r>
-              <a:rPr lang="ja-JP" altLang="en-US" sz="2400" b="1" dirty="0">
-                <a:solidFill>
-                  <a:srgbClr val="FF0000"/>
-                </a:solidFill>
-              </a:rPr>
-              <a:t>の所有権も１つ増えます。</a:t>
-            </a:r>
-            <a:endParaRPr lang="en-US" altLang="ja-JP" sz="2400" b="1" dirty="0">
-              <a:solidFill>
-                <a:srgbClr val="FF0000"/>
-              </a:solidFill>
-            </a:endParaRPr>
-          </a:p>
-          <a:p>
-            <a:r>
-              <a:rPr lang="en-US" altLang="ja-JP" sz="2400" dirty="0"/>
-              <a:t>Weak</a:t>
-            </a:r>
-            <a:r>
-              <a:rPr lang="ja-JP" altLang="en-US" sz="2400" dirty="0"/>
-              <a:t>ポインターからはメンバーにアクセスできないため、</a:t>
-            </a:r>
-            <a:endParaRPr lang="en-US" altLang="ja-JP" sz="2400" dirty="0"/>
-          </a:p>
-          <a:p>
-            <a:r>
-              <a:rPr lang="en-US" altLang="ja-JP" sz="2400" dirty="0"/>
-              <a:t>lock</a:t>
-            </a:r>
-            <a:r>
-              <a:rPr lang="ja-JP" altLang="en-US" sz="2400" dirty="0"/>
-              <a:t>関数から</a:t>
-            </a:r>
-            <a:r>
-              <a:rPr lang="en-US" altLang="ja-JP" sz="2400" dirty="0"/>
-              <a:t>Shared</a:t>
-            </a:r>
-            <a:r>
-              <a:rPr lang="ja-JP" altLang="en-US" sz="2400" dirty="0"/>
-              <a:t>を取得してアクセスします。</a:t>
-            </a:r>
-            <a:endParaRPr lang="en-US" altLang="ja-JP" sz="2400" dirty="0"/>
-          </a:p>
-        </p:txBody>
-      </p:sp>
-      <p:pic>
-        <p:nvPicPr>
-          <p:cNvPr id="3" name="図 2">
-            <a:extLst>
-              <a:ext uri="{FF2B5EF4-FFF2-40B4-BE49-F238E27FC236}">
-                <a16:creationId xmlns:a16="http://schemas.microsoft.com/office/drawing/2014/main" id="{35C678E0-0131-4A47-8B3A-FDFBEFF30EB6}"/>
-              </a:ext>
-            </a:extLst>
-          </p:cNvPr>
-          <p:cNvPicPr>
-            <a:picLocks noChangeAspect="1"/>
-          </p:cNvPicPr>
-          <p:nvPr/>
-        </p:nvPicPr>
-        <p:blipFill>
-          <a:blip r:embed="rId2"/>
-          <a:stretch>
-            <a:fillRect/>
-          </a:stretch>
-        </p:blipFill>
-        <p:spPr>
-          <a:xfrm>
-            <a:off x="567542" y="2921307"/>
-            <a:ext cx="7464834" cy="2484547"/>
-          </a:xfrm>
-          <a:prstGeom prst="rect">
-            <a:avLst/>
-          </a:prstGeom>
-        </p:spPr>
-      </p:pic>
-    </p:spTree>
-    <p:extLst>
-      <p:ext uri="{BB962C8B-B14F-4D97-AF65-F5344CB8AC3E}">
-        <p14:creationId xmlns:p14="http://schemas.microsoft.com/office/powerpoint/2010/main" val="1815629146"/>
-      </p:ext>
-    </p:extLst>
-  </p:cSld>
-  <p:clrMapOvr>
-    <a:masterClrMapping/>
-  </p:clrMapOvr>
-</p:sld>
-</file>
-
-<file path=ppt/slides/slide17.xml><?xml version="1.0" encoding="utf-8"?>
-<p:sld xmlns:a="http://schemas.openxmlformats.org/drawingml/2006/main" xmlns:r="http://schemas.openxmlformats.org/officeDocument/2006/relationships" xmlns:p="http://schemas.openxmlformats.org/presentationml/2006/main">
-  <p:cSld>
-    <p:spTree>
-      <p:nvGrpSpPr>
-        <p:cNvPr id="1" name=""/>
-        <p:cNvGrpSpPr/>
-        <p:nvPr/>
-      </p:nvGrpSpPr>
-      <p:grpSpPr>
-        <a:xfrm>
-          <a:off x="0" y="0"/>
-          <a:ext cx="0" cy="0"/>
-          <a:chOff x="0" y="0"/>
-          <a:chExt cx="0" cy="0"/>
-        </a:xfrm>
-      </p:grpSpPr>
-      <p:sp>
-        <p:nvSpPr>
-          <p:cNvPr id="4" name="テキスト ボックス 3">
-            <a:extLst>
-              <a:ext uri="{FF2B5EF4-FFF2-40B4-BE49-F238E27FC236}">
-                <a16:creationId xmlns:a16="http://schemas.microsoft.com/office/drawing/2014/main" id="{5A13BF46-B8C5-48AA-8308-C9ECFF431A18}"/>
-              </a:ext>
-            </a:extLst>
-          </p:cNvPr>
-          <p:cNvSpPr txBox="1"/>
-          <p:nvPr/>
-        </p:nvSpPr>
-        <p:spPr>
-          <a:xfrm>
-            <a:off x="567542" y="491954"/>
-            <a:ext cx="3877985" cy="584775"/>
-          </a:xfrm>
-          <a:prstGeom prst="rect">
-            <a:avLst/>
-          </a:prstGeom>
-          <a:noFill/>
-        </p:spPr>
-        <p:txBody>
-          <a:bodyPr wrap="none" rtlCol="0">
-            <a:spAutoFit/>
-          </a:bodyPr>
-          <a:lstStyle/>
-          <a:p>
-            <a:r>
-              <a:rPr lang="ja-JP" altLang="en-US" sz="3200" b="1" u="sng" dirty="0"/>
-              <a:t>スマートポインター</a:t>
-            </a:r>
-            <a:endParaRPr kumimoji="1" lang="ja-JP" altLang="en-US" sz="3200" b="1" u="sng" dirty="0"/>
-          </a:p>
-        </p:txBody>
-      </p:sp>
-      <p:sp>
-        <p:nvSpPr>
-          <p:cNvPr id="6" name="テキスト ボックス 5">
-            <a:extLst>
-              <a:ext uri="{FF2B5EF4-FFF2-40B4-BE49-F238E27FC236}">
-                <a16:creationId xmlns:a16="http://schemas.microsoft.com/office/drawing/2014/main" id="{55830AD6-028B-4C4E-80BF-B70DFC1C3A46}"/>
-              </a:ext>
-            </a:extLst>
-          </p:cNvPr>
-          <p:cNvSpPr txBox="1"/>
-          <p:nvPr/>
-        </p:nvSpPr>
-        <p:spPr>
-          <a:xfrm>
-            <a:off x="567542" y="1216429"/>
-            <a:ext cx="9874819" cy="461665"/>
-          </a:xfrm>
-          <a:prstGeom prst="rect">
-            <a:avLst/>
-          </a:prstGeom>
-          <a:noFill/>
-        </p:spPr>
-        <p:txBody>
-          <a:bodyPr wrap="none" rtlCol="0">
-            <a:spAutoFit/>
-          </a:bodyPr>
-          <a:lstStyle/>
-          <a:p>
-            <a:r>
-              <a:rPr lang="ja-JP" altLang="en-US" sz="2400" b="1" dirty="0">
-                <a:solidFill>
-                  <a:srgbClr val="FF0000"/>
-                </a:solidFill>
-              </a:rPr>
-              <a:t>参照先の</a:t>
-            </a:r>
-            <a:r>
-              <a:rPr lang="en-US" altLang="ja-JP" sz="2400" b="1" dirty="0">
-                <a:solidFill>
-                  <a:srgbClr val="FF0000"/>
-                </a:solidFill>
-              </a:rPr>
-              <a:t>Shared</a:t>
-            </a:r>
-            <a:r>
-              <a:rPr lang="ja-JP" altLang="en-US" sz="2400" b="1" dirty="0">
-                <a:solidFill>
-                  <a:srgbClr val="FF0000"/>
-                </a:solidFill>
-              </a:rPr>
-              <a:t>が消えていた場合、</a:t>
-            </a:r>
-            <a:r>
-              <a:rPr lang="en-US" altLang="ja-JP" sz="2400" b="1" dirty="0">
-                <a:solidFill>
-                  <a:srgbClr val="FF0000"/>
-                </a:solidFill>
-              </a:rPr>
-              <a:t>lock</a:t>
-            </a:r>
-            <a:r>
-              <a:rPr lang="ja-JP" altLang="en-US" sz="2400" b="1" dirty="0">
-                <a:solidFill>
-                  <a:srgbClr val="FF0000"/>
-                </a:solidFill>
-              </a:rPr>
-              <a:t>関数は</a:t>
-            </a:r>
-            <a:r>
-              <a:rPr lang="en-US" altLang="ja-JP" sz="2400" b="1" dirty="0">
-                <a:solidFill>
-                  <a:srgbClr val="FF0000"/>
-                </a:solidFill>
-              </a:rPr>
-              <a:t>empty</a:t>
-            </a:r>
-            <a:r>
-              <a:rPr lang="ja-JP" altLang="en-US" sz="2400" b="1" dirty="0">
-                <a:solidFill>
-                  <a:srgbClr val="FF0000"/>
-                </a:solidFill>
-              </a:rPr>
-              <a:t>を返却します。</a:t>
-            </a:r>
-            <a:endParaRPr lang="en-US" altLang="ja-JP" sz="2400" b="1" dirty="0">
-              <a:solidFill>
-                <a:srgbClr val="FF0000"/>
-              </a:solidFill>
-            </a:endParaRPr>
-          </a:p>
-        </p:txBody>
-      </p:sp>
-      <p:pic>
-        <p:nvPicPr>
-          <p:cNvPr id="10" name="図 9">
-            <a:extLst>
-              <a:ext uri="{FF2B5EF4-FFF2-40B4-BE49-F238E27FC236}">
-                <a16:creationId xmlns:a16="http://schemas.microsoft.com/office/drawing/2014/main" id="{9FA8E109-1019-4692-AA73-AE771215D3A5}"/>
-              </a:ext>
-            </a:extLst>
-          </p:cNvPr>
-          <p:cNvPicPr>
-            <a:picLocks noChangeAspect="1"/>
-          </p:cNvPicPr>
-          <p:nvPr/>
-        </p:nvPicPr>
-        <p:blipFill>
-          <a:blip r:embed="rId2"/>
-          <a:stretch>
-            <a:fillRect/>
-          </a:stretch>
-        </p:blipFill>
-        <p:spPr>
-          <a:xfrm>
-            <a:off x="567541" y="1817794"/>
-            <a:ext cx="9447665" cy="3749288"/>
-          </a:xfrm>
-          <a:prstGeom prst="rect">
-            <a:avLst/>
-          </a:prstGeom>
-        </p:spPr>
-      </p:pic>
-    </p:spTree>
-    <p:extLst>
-      <p:ext uri="{BB962C8B-B14F-4D97-AF65-F5344CB8AC3E}">
-        <p14:creationId xmlns:p14="http://schemas.microsoft.com/office/powerpoint/2010/main" val="71330503"/>
-      </p:ext>
-    </p:extLst>
-  </p:cSld>
-  <p:clrMapOvr>
-    <a:masterClrMapping/>
-  </p:clrMapOvr>
-</p:sld>
-</file>
-
-<file path=ppt/slides/slide18.xml><?xml version="1.0" encoding="utf-8"?>
-<p:sld xmlns:a="http://schemas.openxmlformats.org/drawingml/2006/main" xmlns:r="http://schemas.openxmlformats.org/officeDocument/2006/relationships" xmlns:p="http://schemas.openxmlformats.org/presentationml/2006/main">
-  <p:cSld>
-    <p:spTree>
-      <p:nvGrpSpPr>
-        <p:cNvPr id="1" name=""/>
-        <p:cNvGrpSpPr/>
-        <p:nvPr/>
-      </p:nvGrpSpPr>
-      <p:grpSpPr>
-        <a:xfrm>
-          <a:off x="0" y="0"/>
-          <a:ext cx="0" cy="0"/>
-          <a:chOff x="0" y="0"/>
-          <a:chExt cx="0" cy="0"/>
-        </a:xfrm>
-      </p:grpSpPr>
-      <p:sp>
-        <p:nvSpPr>
-          <p:cNvPr id="4" name="テキスト ボックス 3">
-            <a:extLst>
-              <a:ext uri="{FF2B5EF4-FFF2-40B4-BE49-F238E27FC236}">
-                <a16:creationId xmlns:a16="http://schemas.microsoft.com/office/drawing/2014/main" id="{5A13BF46-B8C5-48AA-8308-C9ECFF431A18}"/>
-              </a:ext>
-            </a:extLst>
-          </p:cNvPr>
-          <p:cNvSpPr txBox="1"/>
-          <p:nvPr/>
-        </p:nvSpPr>
-        <p:spPr>
-          <a:xfrm>
-            <a:off x="567542" y="491954"/>
-            <a:ext cx="3877985" cy="584775"/>
-          </a:xfrm>
-          <a:prstGeom prst="rect">
-            <a:avLst/>
-          </a:prstGeom>
-          <a:noFill/>
-        </p:spPr>
-        <p:txBody>
-          <a:bodyPr wrap="none" rtlCol="0">
-            <a:spAutoFit/>
-          </a:bodyPr>
-          <a:lstStyle/>
-          <a:p>
-            <a:r>
-              <a:rPr lang="ja-JP" altLang="en-US" sz="3200" b="1" u="sng" dirty="0"/>
-              <a:t>スマートポインター</a:t>
-            </a:r>
-            <a:endParaRPr kumimoji="1" lang="ja-JP" altLang="en-US" sz="3200" b="1" u="sng" dirty="0"/>
-          </a:p>
-        </p:txBody>
-      </p:sp>
-      <p:sp>
-        <p:nvSpPr>
-          <p:cNvPr id="6" name="テキスト ボックス 5">
-            <a:extLst>
-              <a:ext uri="{FF2B5EF4-FFF2-40B4-BE49-F238E27FC236}">
-                <a16:creationId xmlns:a16="http://schemas.microsoft.com/office/drawing/2014/main" id="{55830AD6-028B-4C4E-80BF-B70DFC1C3A46}"/>
-              </a:ext>
-            </a:extLst>
-          </p:cNvPr>
-          <p:cNvSpPr txBox="1"/>
-          <p:nvPr/>
-        </p:nvSpPr>
-        <p:spPr>
-          <a:xfrm>
-            <a:off x="567542" y="1216429"/>
-            <a:ext cx="9062096" cy="3785652"/>
-          </a:xfrm>
-          <a:prstGeom prst="rect">
-            <a:avLst/>
-          </a:prstGeom>
-          <a:noFill/>
-        </p:spPr>
-        <p:txBody>
-          <a:bodyPr wrap="none" rtlCol="0">
-            <a:spAutoFit/>
-          </a:bodyPr>
-          <a:lstStyle/>
-          <a:p>
-            <a:r>
-              <a:rPr lang="en-US" altLang="ja-JP" sz="2400" b="1" dirty="0">
-                <a:solidFill>
-                  <a:srgbClr val="00B050"/>
-                </a:solidFill>
-              </a:rPr>
-              <a:t>Weak</a:t>
-            </a:r>
-            <a:r>
-              <a:rPr lang="ja-JP" altLang="en-US" sz="2400" dirty="0"/>
-              <a:t>は</a:t>
-            </a:r>
-            <a:r>
-              <a:rPr lang="en-US" altLang="ja-JP" sz="2400" b="1" dirty="0">
-                <a:solidFill>
-                  <a:srgbClr val="FF0000"/>
-                </a:solidFill>
-              </a:rPr>
-              <a:t>Shared</a:t>
-            </a:r>
-            <a:r>
-              <a:rPr lang="ja-JP" altLang="en-US" sz="2400" b="1" dirty="0">
-                <a:solidFill>
-                  <a:srgbClr val="FF0000"/>
-                </a:solidFill>
-              </a:rPr>
-              <a:t>を安全に使用するためにあるポインター</a:t>
-            </a:r>
-            <a:r>
-              <a:rPr lang="ja-JP" altLang="en-US" sz="2400" dirty="0"/>
-              <a:t>です。</a:t>
-            </a:r>
-            <a:endParaRPr lang="en-US" altLang="ja-JP" sz="2400" dirty="0"/>
-          </a:p>
-          <a:p>
-            <a:r>
-              <a:rPr lang="en-US" altLang="ja-JP" sz="2400" b="1" dirty="0">
-                <a:solidFill>
-                  <a:srgbClr val="0070C0"/>
-                </a:solidFill>
-              </a:rPr>
-              <a:t>lock</a:t>
-            </a:r>
-            <a:r>
-              <a:rPr lang="ja-JP" altLang="en-US" sz="2400" b="1" dirty="0">
-                <a:solidFill>
-                  <a:srgbClr val="0070C0"/>
-                </a:solidFill>
-              </a:rPr>
-              <a:t>関数</a:t>
-            </a:r>
-            <a:r>
-              <a:rPr lang="ja-JP" altLang="en-US" sz="2400" dirty="0"/>
-              <a:t>をローカルに使うことにより、</a:t>
-            </a:r>
-            <a:endParaRPr lang="en-US" altLang="ja-JP" sz="2400" dirty="0"/>
-          </a:p>
-          <a:p>
-            <a:r>
-              <a:rPr lang="ja-JP" altLang="en-US" sz="2400" dirty="0"/>
-              <a:t>危険な</a:t>
-            </a:r>
-            <a:r>
-              <a:rPr lang="en-US" altLang="ja-JP" sz="2400" dirty="0"/>
-              <a:t>Shared</a:t>
-            </a:r>
-            <a:r>
-              <a:rPr lang="ja-JP" altLang="en-US" sz="2400" dirty="0"/>
-              <a:t>のコピーを回避することができます。</a:t>
-            </a:r>
-            <a:endParaRPr lang="en-US" altLang="ja-JP" sz="2400" dirty="0"/>
-          </a:p>
-          <a:p>
-            <a:endParaRPr lang="en-US" altLang="ja-JP" sz="2400" dirty="0"/>
-          </a:p>
-          <a:p>
-            <a:r>
-              <a:rPr lang="ja-JP" altLang="en-US" sz="2400" dirty="0"/>
-              <a:t>安全なプログラムを組むためにも、</a:t>
-            </a:r>
-            <a:endParaRPr lang="en-US" altLang="ja-JP" sz="2400" dirty="0"/>
-          </a:p>
-          <a:p>
-            <a:r>
-              <a:rPr lang="en-US" altLang="ja-JP" sz="2400" b="1" dirty="0">
-                <a:solidFill>
-                  <a:srgbClr val="FF0000"/>
-                </a:solidFill>
-              </a:rPr>
-              <a:t>Shared</a:t>
-            </a:r>
-            <a:r>
-              <a:rPr lang="ja-JP" altLang="en-US" sz="2400" b="1" dirty="0">
-                <a:solidFill>
-                  <a:srgbClr val="FF0000"/>
-                </a:solidFill>
-              </a:rPr>
-              <a:t>のコピーを使用する際は、一度</a:t>
-            </a:r>
-            <a:r>
-              <a:rPr lang="en-US" altLang="ja-JP" sz="2400" b="1" dirty="0">
-                <a:solidFill>
-                  <a:srgbClr val="FF0000"/>
-                </a:solidFill>
-              </a:rPr>
-              <a:t>Weak</a:t>
-            </a:r>
-            <a:r>
-              <a:rPr lang="ja-JP" altLang="en-US" sz="2400" b="1" dirty="0">
-                <a:solidFill>
-                  <a:srgbClr val="FF0000"/>
-                </a:solidFill>
-              </a:rPr>
-              <a:t>を検討しましょう。</a:t>
-            </a:r>
-            <a:endParaRPr lang="en-US" altLang="ja-JP" sz="2400" b="1" dirty="0">
-              <a:solidFill>
-                <a:srgbClr val="FF0000"/>
-              </a:solidFill>
-            </a:endParaRPr>
-          </a:p>
-          <a:p>
-            <a:endParaRPr lang="en-US" altLang="ja-JP" sz="2400" dirty="0"/>
-          </a:p>
-          <a:p>
-            <a:r>
-              <a:rPr lang="ja-JP" altLang="en-US" sz="2400" b="1" dirty="0">
-                <a:solidFill>
-                  <a:srgbClr val="FF0000"/>
-                </a:solidFill>
-              </a:rPr>
-              <a:t>■注意</a:t>
-            </a:r>
-            <a:endParaRPr lang="en-US" altLang="ja-JP" sz="2400" b="1" dirty="0">
-              <a:solidFill>
-                <a:srgbClr val="FF0000"/>
-              </a:solidFill>
-            </a:endParaRPr>
-          </a:p>
-          <a:p>
-            <a:r>
-              <a:rPr lang="en-US" altLang="ja-JP" sz="2400" b="1" dirty="0">
-                <a:solidFill>
-                  <a:srgbClr val="0070C0"/>
-                </a:solidFill>
-              </a:rPr>
-              <a:t>lock</a:t>
-            </a:r>
-            <a:r>
-              <a:rPr lang="ja-JP" altLang="en-US" sz="2400" b="1" dirty="0">
-                <a:solidFill>
-                  <a:srgbClr val="0070C0"/>
-                </a:solidFill>
-              </a:rPr>
-              <a:t>関数</a:t>
-            </a:r>
-            <a:r>
-              <a:rPr lang="ja-JP" altLang="en-US" sz="2400" dirty="0"/>
-              <a:t>の受取先が</a:t>
-            </a:r>
-            <a:r>
-              <a:rPr lang="ja-JP" altLang="en-US" sz="2400" b="1" dirty="0">
-                <a:solidFill>
-                  <a:srgbClr val="FF0000"/>
-                </a:solidFill>
-              </a:rPr>
-              <a:t>グローバル変数</a:t>
-            </a:r>
-            <a:r>
-              <a:rPr lang="ja-JP" altLang="en-US" sz="2400" dirty="0"/>
-              <a:t>だと、</a:t>
-            </a:r>
-            <a:endParaRPr lang="en-US" altLang="ja-JP" sz="2400" dirty="0"/>
-          </a:p>
-          <a:p>
-            <a:r>
-              <a:rPr lang="ja-JP" altLang="en-US" sz="2400" dirty="0"/>
-              <a:t>所有権が残りっぱなしで自動削除されないことが起きます。</a:t>
-            </a:r>
-            <a:endParaRPr lang="en-US" altLang="ja-JP" sz="2400" dirty="0"/>
-          </a:p>
-        </p:txBody>
-      </p:sp>
-    </p:spTree>
-    <p:extLst>
-      <p:ext uri="{BB962C8B-B14F-4D97-AF65-F5344CB8AC3E}">
-        <p14:creationId xmlns:p14="http://schemas.microsoft.com/office/powerpoint/2010/main" val="714390846"/>
-      </p:ext>
-    </p:extLst>
-  </p:cSld>
-  <p:clrMapOvr>
-    <a:masterClrMapping/>
-  </p:clrMapOvr>
-</p:sld>
-</file>
-
-<file path=ppt/slides/slide19.xml><?xml version="1.0" encoding="utf-8"?>
-<p:sld xmlns:a="http://schemas.openxmlformats.org/drawingml/2006/main" xmlns:r="http://schemas.openxmlformats.org/officeDocument/2006/relationships" xmlns:p="http://schemas.openxmlformats.org/presentationml/2006/main">
-  <p:cSld>
-    <p:spTree>
-      <p:nvGrpSpPr>
-        <p:cNvPr id="1" name=""/>
-        <p:cNvGrpSpPr/>
-        <p:nvPr/>
-      </p:nvGrpSpPr>
-      <p:grpSpPr>
-        <a:xfrm>
-          <a:off x="0" y="0"/>
-          <a:ext cx="0" cy="0"/>
-          <a:chOff x="0" y="0"/>
-          <a:chExt cx="0" cy="0"/>
-        </a:xfrm>
-      </p:grpSpPr>
-      <p:sp>
-        <p:nvSpPr>
-          <p:cNvPr id="4" name="テキスト ボックス 3">
-            <a:extLst>
-              <a:ext uri="{FF2B5EF4-FFF2-40B4-BE49-F238E27FC236}">
-                <a16:creationId xmlns:a16="http://schemas.microsoft.com/office/drawing/2014/main" id="{5A13BF46-B8C5-48AA-8308-C9ECFF431A18}"/>
-              </a:ext>
-            </a:extLst>
-          </p:cNvPr>
-          <p:cNvSpPr txBox="1"/>
-          <p:nvPr/>
-        </p:nvSpPr>
-        <p:spPr>
-          <a:xfrm>
-            <a:off x="567542" y="491954"/>
-            <a:ext cx="3877985" cy="584775"/>
-          </a:xfrm>
-          <a:prstGeom prst="rect">
-            <a:avLst/>
-          </a:prstGeom>
-          <a:noFill/>
-        </p:spPr>
-        <p:txBody>
-          <a:bodyPr wrap="none" rtlCol="0">
-            <a:spAutoFit/>
-          </a:bodyPr>
-          <a:lstStyle/>
-          <a:p>
-            <a:r>
-              <a:rPr lang="ja-JP" altLang="en-US" sz="3200" b="1" u="sng" dirty="0"/>
-              <a:t>スマートポインター</a:t>
-            </a:r>
-            <a:endParaRPr kumimoji="1" lang="ja-JP" altLang="en-US" sz="3200" b="1" u="sng" dirty="0"/>
-          </a:p>
-        </p:txBody>
-      </p:sp>
-      <p:sp>
-        <p:nvSpPr>
-          <p:cNvPr id="6" name="テキスト ボックス 5">
-            <a:extLst>
-              <a:ext uri="{FF2B5EF4-FFF2-40B4-BE49-F238E27FC236}">
-                <a16:creationId xmlns:a16="http://schemas.microsoft.com/office/drawing/2014/main" id="{55830AD6-028B-4C4E-80BF-B70DFC1C3A46}"/>
-              </a:ext>
-            </a:extLst>
-          </p:cNvPr>
-          <p:cNvSpPr txBox="1"/>
-          <p:nvPr/>
-        </p:nvSpPr>
-        <p:spPr>
-          <a:xfrm>
-            <a:off x="567542" y="1216429"/>
-            <a:ext cx="11264622" cy="4524315"/>
-          </a:xfrm>
-          <a:prstGeom prst="rect">
-            <a:avLst/>
-          </a:prstGeom>
-          <a:noFill/>
-        </p:spPr>
-        <p:txBody>
-          <a:bodyPr wrap="none" rtlCol="0">
-            <a:spAutoFit/>
-          </a:bodyPr>
-          <a:lstStyle/>
-          <a:p>
-            <a:r>
-              <a:rPr lang="ja-JP" altLang="en-US" sz="2400" dirty="0"/>
-              <a:t>ゲーム制作では基本的に</a:t>
-            </a:r>
-            <a:r>
-              <a:rPr lang="en-US" altLang="ja-JP" sz="2400" b="1" dirty="0">
-                <a:solidFill>
-                  <a:srgbClr val="00B050"/>
-                </a:solidFill>
-              </a:rPr>
-              <a:t>Unique</a:t>
-            </a:r>
-            <a:r>
-              <a:rPr lang="ja-JP" altLang="en-US" sz="2400" dirty="0"/>
-              <a:t>を使います。</a:t>
-            </a:r>
-            <a:endParaRPr lang="en-US" altLang="ja-JP" sz="2400" dirty="0"/>
-          </a:p>
-          <a:p>
-            <a:r>
-              <a:rPr lang="en-US" altLang="ja-JP" sz="2400" b="1" dirty="0">
-                <a:solidFill>
-                  <a:srgbClr val="00B050"/>
-                </a:solidFill>
-              </a:rPr>
-              <a:t>Unique</a:t>
-            </a:r>
-            <a:r>
-              <a:rPr lang="ja-JP" altLang="en-US" sz="2400" dirty="0"/>
-              <a:t>で実装できない場合は</a:t>
-            </a:r>
-            <a:r>
-              <a:rPr lang="en-US" altLang="ja-JP" sz="2400" b="1" dirty="0">
-                <a:solidFill>
-                  <a:srgbClr val="00B050"/>
-                </a:solidFill>
-              </a:rPr>
-              <a:t>Shared</a:t>
-            </a:r>
-            <a:r>
-              <a:rPr lang="ja-JP" altLang="en-US" sz="2400" dirty="0"/>
-              <a:t>や</a:t>
-            </a:r>
-            <a:r>
-              <a:rPr lang="en-US" altLang="ja-JP" sz="2400" b="1" dirty="0">
-                <a:solidFill>
-                  <a:srgbClr val="00B050"/>
-                </a:solidFill>
-              </a:rPr>
-              <a:t>Weak</a:t>
-            </a:r>
-            <a:r>
-              <a:rPr lang="ja-JP" altLang="en-US" sz="2400" dirty="0"/>
-              <a:t>を使っていきます。</a:t>
-            </a:r>
-            <a:endParaRPr lang="en-US" altLang="ja-JP" sz="2400" dirty="0"/>
-          </a:p>
-          <a:p>
-            <a:endParaRPr lang="en-US" altLang="ja-JP" sz="2400" dirty="0"/>
-          </a:p>
-          <a:p>
-            <a:r>
-              <a:rPr lang="ja-JP" altLang="en-US" sz="2400" dirty="0"/>
-              <a:t>自動</a:t>
-            </a:r>
-            <a:r>
-              <a:rPr lang="en-US" altLang="ja-JP" sz="2400" dirty="0"/>
-              <a:t>delete</a:t>
-            </a:r>
-            <a:r>
-              <a:rPr lang="ja-JP" altLang="en-US" sz="2400" dirty="0"/>
-              <a:t>のおかげでメモリリークのリスクを大幅に下げられます。</a:t>
-            </a:r>
-            <a:endParaRPr lang="en-US" altLang="ja-JP" sz="2400" dirty="0"/>
-          </a:p>
-          <a:p>
-            <a:r>
-              <a:rPr lang="ja-JP" altLang="en-US" sz="2400" dirty="0"/>
-              <a:t>積極的に使っていきましょう。</a:t>
-            </a:r>
-            <a:endParaRPr lang="en-US" altLang="ja-JP" sz="2400" dirty="0"/>
-          </a:p>
-          <a:p>
-            <a:endParaRPr lang="en-US" altLang="ja-JP" sz="2400" dirty="0"/>
-          </a:p>
-          <a:p>
-            <a:r>
-              <a:rPr lang="ja-JP" altLang="en-US" sz="2400" b="1" dirty="0">
-                <a:solidFill>
-                  <a:srgbClr val="7030A0"/>
-                </a:solidFill>
-              </a:rPr>
-              <a:t>おまけ：</a:t>
-            </a:r>
-            <a:r>
-              <a:rPr lang="en-US" altLang="ja-JP" sz="2400" b="1" dirty="0">
-                <a:solidFill>
-                  <a:srgbClr val="7030A0"/>
-                </a:solidFill>
-              </a:rPr>
-              <a:t>C</a:t>
-            </a:r>
-            <a:r>
-              <a:rPr lang="ja-JP" altLang="en-US" sz="2400" b="1" dirty="0">
-                <a:solidFill>
-                  <a:srgbClr val="7030A0"/>
-                </a:solidFill>
-              </a:rPr>
-              <a:t>＃の場合</a:t>
-            </a:r>
-            <a:endParaRPr lang="en-US" altLang="ja-JP" sz="2400" b="1" dirty="0">
-              <a:solidFill>
-                <a:srgbClr val="7030A0"/>
-              </a:solidFill>
-            </a:endParaRPr>
-          </a:p>
-          <a:p>
-            <a:r>
-              <a:rPr lang="en-US" altLang="ja-JP" sz="2400" dirty="0"/>
-              <a:t>Unity</a:t>
-            </a:r>
-            <a:r>
-              <a:rPr lang="ja-JP" altLang="en-US" sz="2400" dirty="0"/>
-              <a:t>で使う</a:t>
-            </a:r>
-            <a:r>
-              <a:rPr lang="en-US" altLang="ja-JP" sz="2400" dirty="0"/>
-              <a:t>C#</a:t>
-            </a:r>
-            <a:r>
-              <a:rPr lang="ja-JP" altLang="en-US" sz="2400" dirty="0"/>
-              <a:t>は、安全にメモリを使用するという方針から、</a:t>
-            </a:r>
-            <a:endParaRPr lang="en-US" altLang="ja-JP" sz="2400" dirty="0"/>
-          </a:p>
-          <a:p>
-            <a:r>
-              <a:rPr lang="ja-JP" altLang="en-US" sz="2400" dirty="0"/>
-              <a:t>全てのオブジェクトが</a:t>
-            </a:r>
-            <a:r>
-              <a:rPr lang="en-US" altLang="ja-JP" sz="2400" dirty="0"/>
-              <a:t>Shared</a:t>
-            </a:r>
-            <a:r>
-              <a:rPr lang="ja-JP" altLang="en-US" sz="2400" dirty="0"/>
-              <a:t>で管理されます。</a:t>
-            </a:r>
-            <a:endParaRPr lang="en-US" altLang="ja-JP" sz="2400" dirty="0"/>
-          </a:p>
-          <a:p>
-            <a:r>
-              <a:rPr lang="ja-JP" altLang="en-US" sz="2400" dirty="0"/>
-              <a:t>どこからも参照されなくなったオブジェクトは削除リストに追加され、</a:t>
-            </a:r>
-            <a:endParaRPr lang="en-US" altLang="ja-JP" sz="2400" dirty="0"/>
-          </a:p>
-          <a:p>
-            <a:r>
-              <a:rPr lang="ja-JP" altLang="en-US" sz="2400" dirty="0"/>
-              <a:t>削除リストにあるオブジェクトは、メモリの空きが少なくなった時に作動する</a:t>
-            </a:r>
-            <a:endParaRPr lang="en-US" altLang="ja-JP" sz="2400" dirty="0"/>
-          </a:p>
-          <a:p>
-            <a:r>
-              <a:rPr lang="ja-JP" altLang="en-US" sz="2400" dirty="0"/>
-              <a:t>ガベージコレクションで削除されます。</a:t>
-            </a:r>
-            <a:endParaRPr lang="en-US" altLang="ja-JP" sz="2400" dirty="0"/>
-          </a:p>
-        </p:txBody>
-      </p:sp>
-    </p:spTree>
-    <p:extLst>
-      <p:ext uri="{BB962C8B-B14F-4D97-AF65-F5344CB8AC3E}">
-        <p14:creationId xmlns:p14="http://schemas.microsoft.com/office/powerpoint/2010/main" val="3261218914"/>
+        <p14:creationId xmlns:p14="http://schemas.microsoft.com/office/powerpoint/2010/main" val="1060350228"/>
       </p:ext>
     </p:extLst>
   </p:cSld>
@@ -6455,7 +4202,7 @@
         <p:spPr>
           <a:xfrm>
             <a:off x="567542" y="491954"/>
-            <a:ext cx="3877985" cy="584775"/>
+            <a:ext cx="3057247" cy="584775"/>
           </a:xfrm>
           <a:prstGeom prst="rect">
             <a:avLst/>
@@ -6470,7 +4217,7 @@
           <a:p>
             <a:r>
               <a:rPr lang="ja-JP" altLang="en-US" sz="3200" b="1" u="sng" dirty="0"/>
-              <a:t>スマートポインター</a:t>
+              <a:t>マルチスレッド</a:t>
             </a:r>
             <a:endParaRPr kumimoji="1" lang="ja-JP" altLang="en-US" sz="3200" b="1" u="sng" dirty="0"/>
           </a:p>
@@ -6491,7 +4238,7 @@
         <p:spPr>
           <a:xfrm>
             <a:off x="567542" y="1216429"/>
-            <a:ext cx="9725739" cy="4524315"/>
+            <a:ext cx="3417923" cy="461665"/>
           </a:xfrm>
           <a:prstGeom prst="rect">
             <a:avLst/>
@@ -6505,261 +4252,16 @@
           <a:lstStyle/>
           <a:p>
             <a:r>
-              <a:rPr lang="en-US" altLang="ja-JP" sz="2400" dirty="0"/>
-              <a:t>2011</a:t>
-            </a:r>
-            <a:r>
-              <a:rPr lang="ja-JP" altLang="en-US" sz="2400" dirty="0"/>
-              <a:t>年に</a:t>
-            </a:r>
-            <a:r>
-              <a:rPr lang="en-US" altLang="ja-JP" sz="2400" dirty="0"/>
-              <a:t>C++</a:t>
-            </a:r>
-            <a:r>
-              <a:rPr lang="ja-JP" altLang="en-US" sz="2400" dirty="0"/>
-              <a:t>のバージョンアップが行われました。（</a:t>
-            </a:r>
-            <a:r>
-              <a:rPr lang="en-US" altLang="ja-JP" sz="2400" dirty="0"/>
-              <a:t>C++11</a:t>
-            </a:r>
-            <a:r>
-              <a:rPr lang="ja-JP" altLang="en-US" sz="2400" dirty="0"/>
-              <a:t>）</a:t>
-            </a:r>
-            <a:endParaRPr lang="en-US" altLang="ja-JP" sz="2400" dirty="0"/>
-          </a:p>
-          <a:p>
-            <a:r>
-              <a:rPr lang="ja-JP" altLang="en-US" sz="2400" dirty="0"/>
-              <a:t>そこで新たに</a:t>
-            </a:r>
-            <a:r>
-              <a:rPr lang="ja-JP" altLang="en-US" sz="2400" b="1" dirty="0">
-                <a:solidFill>
-                  <a:srgbClr val="FF0000"/>
-                </a:solidFill>
-              </a:rPr>
-              <a:t>スマートポインター</a:t>
-            </a:r>
-            <a:r>
-              <a:rPr lang="ja-JP" altLang="en-US" sz="2400" dirty="0"/>
-              <a:t>というものが実装されています。</a:t>
-            </a:r>
-            <a:endParaRPr lang="en-US" altLang="ja-JP" sz="2400" dirty="0"/>
-          </a:p>
-          <a:p>
-            <a:endParaRPr lang="en-US" altLang="ja-JP" sz="2400" dirty="0"/>
-          </a:p>
-          <a:p>
-            <a:r>
-              <a:rPr lang="ja-JP" altLang="en-US" sz="2400" dirty="0"/>
-              <a:t>スマートポインターは</a:t>
-            </a:r>
-            <a:r>
               <a:rPr lang="en-US" altLang="ja-JP" sz="2400" b="1" dirty="0">
                 <a:solidFill>
                   <a:srgbClr val="FF0000"/>
                 </a:solidFill>
               </a:rPr>
-              <a:t>delete</a:t>
-            </a:r>
-            <a:r>
-              <a:rPr lang="ja-JP" altLang="en-US" sz="2400" b="1" dirty="0">
-                <a:solidFill>
-                  <a:srgbClr val="FF0000"/>
-                </a:solidFill>
-              </a:rPr>
-              <a:t>を自動で呼び出す機能</a:t>
+              <a:t>Main.cpp</a:t>
             </a:r>
             <a:r>
               <a:rPr lang="ja-JP" altLang="en-US" sz="2400" dirty="0"/>
-              <a:t>があり、</a:t>
-            </a:r>
-            <a:endParaRPr lang="en-US" altLang="ja-JP" sz="2400" dirty="0"/>
-          </a:p>
-          <a:p>
-            <a:r>
-              <a:rPr lang="ja-JP" altLang="en-US" sz="2400" dirty="0"/>
-              <a:t>正しく使うと</a:t>
-            </a:r>
-            <a:r>
-              <a:rPr lang="ja-JP" altLang="en-US" sz="2400" b="1" dirty="0">
-                <a:solidFill>
-                  <a:srgbClr val="FF0000"/>
-                </a:solidFill>
-              </a:rPr>
-              <a:t>メモリリークのリスクを大幅に減らす</a:t>
-            </a:r>
-            <a:r>
-              <a:rPr lang="ja-JP" altLang="en-US" sz="2400" dirty="0"/>
-              <a:t>ことができます。</a:t>
-            </a:r>
-            <a:endParaRPr lang="en-US" altLang="ja-JP" sz="2400" dirty="0"/>
-          </a:p>
-          <a:p>
-            <a:endParaRPr lang="en-US" altLang="ja-JP" sz="2400" dirty="0"/>
-          </a:p>
-          <a:p>
-            <a:r>
-              <a:rPr lang="ja-JP" altLang="en-US" sz="2400" dirty="0"/>
-              <a:t>最近の技術ですが、ゲーム業界ではかなり普及していますので、</a:t>
-            </a:r>
-            <a:endParaRPr lang="en-US" altLang="ja-JP" sz="2400" dirty="0"/>
-          </a:p>
-          <a:p>
-            <a:r>
-              <a:rPr lang="ja-JP" altLang="en-US" sz="2400" dirty="0"/>
-              <a:t>しっかりと学習しましょう。</a:t>
-            </a:r>
-            <a:endParaRPr lang="en-US" altLang="ja-JP" sz="2400" dirty="0"/>
-          </a:p>
-          <a:p>
-            <a:endParaRPr lang="en-US" altLang="ja-JP" sz="2400" dirty="0"/>
-          </a:p>
-          <a:p>
-            <a:r>
-              <a:rPr lang="en-US" altLang="ja-JP" sz="2400" b="1" dirty="0">
-                <a:solidFill>
-                  <a:srgbClr val="00B050"/>
-                </a:solidFill>
-              </a:rPr>
-              <a:t>MEMO</a:t>
-            </a:r>
-          </a:p>
-          <a:p>
-            <a:r>
-              <a:rPr lang="ja-JP" altLang="en-US" sz="2400" dirty="0"/>
-              <a:t>他にも無駄なメモリ確保を抑えることもできる、</a:t>
-            </a:r>
-            <a:endParaRPr lang="en-US" altLang="ja-JP" sz="2400" dirty="0"/>
-          </a:p>
-          <a:p>
-            <a:r>
-              <a:rPr lang="ja-JP" altLang="en-US" sz="2400" dirty="0"/>
-              <a:t>至れり尽くせりな機能です。</a:t>
-            </a:r>
-            <a:endParaRPr lang="en-US" altLang="ja-JP" sz="2400" dirty="0"/>
-          </a:p>
-        </p:txBody>
-      </p:sp>
-    </p:spTree>
-    <p:extLst>
-      <p:ext uri="{BB962C8B-B14F-4D97-AF65-F5344CB8AC3E}">
-        <p14:creationId xmlns:p14="http://schemas.microsoft.com/office/powerpoint/2010/main" val="3690828070"/>
-      </p:ext>
-    </p:extLst>
-  </p:cSld>
-  <p:clrMapOvr>
-    <a:masterClrMapping/>
-  </p:clrMapOvr>
-</p:sld>
-</file>
-
-<file path=ppt/slides/slide20.xml><?xml version="1.0" encoding="utf-8"?>
-<p:sld xmlns:a="http://schemas.openxmlformats.org/drawingml/2006/main" xmlns:r="http://schemas.openxmlformats.org/officeDocument/2006/relationships" xmlns:p="http://schemas.openxmlformats.org/presentationml/2006/main">
-  <p:cSld>
-    <p:spTree>
-      <p:nvGrpSpPr>
-        <p:cNvPr id="1" name=""/>
-        <p:cNvGrpSpPr/>
-        <p:nvPr/>
-      </p:nvGrpSpPr>
-      <p:grpSpPr>
-        <a:xfrm>
-          <a:off x="0" y="0"/>
-          <a:ext cx="0" cy="0"/>
-          <a:chOff x="0" y="0"/>
-          <a:chExt cx="0" cy="0"/>
-        </a:xfrm>
-      </p:grpSpPr>
-      <p:sp>
-        <p:nvSpPr>
-          <p:cNvPr id="4" name="テキスト ボックス 3">
-            <a:extLst>
-              <a:ext uri="{FF2B5EF4-FFF2-40B4-BE49-F238E27FC236}">
-                <a16:creationId xmlns:a16="http://schemas.microsoft.com/office/drawing/2014/main" id="{5A13BF46-B8C5-48AA-8308-C9ECFF431A18}"/>
-              </a:ext>
-            </a:extLst>
-          </p:cNvPr>
-          <p:cNvSpPr txBox="1"/>
-          <p:nvPr/>
-        </p:nvSpPr>
-        <p:spPr>
-          <a:xfrm>
-            <a:off x="567542" y="491954"/>
-            <a:ext cx="3995004" cy="584775"/>
-          </a:xfrm>
-          <a:prstGeom prst="rect">
-            <a:avLst/>
-          </a:prstGeom>
-          <a:noFill/>
-        </p:spPr>
-        <p:txBody>
-          <a:bodyPr wrap="none" rtlCol="0">
-            <a:spAutoFit/>
-          </a:bodyPr>
-          <a:lstStyle/>
-          <a:p>
-            <a:r>
-              <a:rPr lang="ja-JP" altLang="en-US" sz="3200" b="1" u="sng" dirty="0"/>
-              <a:t>おまけ 機能のラップ</a:t>
-            </a:r>
-            <a:endParaRPr kumimoji="1" lang="ja-JP" altLang="en-US" sz="3200" b="1" u="sng" dirty="0"/>
-          </a:p>
-        </p:txBody>
-      </p:sp>
-      <p:sp>
-        <p:nvSpPr>
-          <p:cNvPr id="6" name="テキスト ボックス 5">
-            <a:extLst>
-              <a:ext uri="{FF2B5EF4-FFF2-40B4-BE49-F238E27FC236}">
-                <a16:creationId xmlns:a16="http://schemas.microsoft.com/office/drawing/2014/main" id="{55830AD6-028B-4C4E-80BF-B70DFC1C3A46}"/>
-              </a:ext>
-            </a:extLst>
-          </p:cNvPr>
-          <p:cNvSpPr txBox="1"/>
-          <p:nvPr/>
-        </p:nvSpPr>
-        <p:spPr>
-          <a:xfrm>
-            <a:off x="567542" y="1216429"/>
-            <a:ext cx="10649069" cy="830997"/>
-          </a:xfrm>
-          <a:prstGeom prst="rect">
-            <a:avLst/>
-          </a:prstGeom>
-          <a:noFill/>
-        </p:spPr>
-        <p:txBody>
-          <a:bodyPr wrap="none" rtlCol="0">
-            <a:spAutoFit/>
-          </a:bodyPr>
-          <a:lstStyle/>
-          <a:p>
-            <a:r>
-              <a:rPr lang="ja-JP" altLang="en-US" sz="2400" dirty="0"/>
-              <a:t>ゲームで実装する際は、</a:t>
-            </a:r>
-            <a:endParaRPr lang="en-US" altLang="ja-JP" sz="2400" dirty="0"/>
-          </a:p>
-          <a:p>
-            <a:r>
-              <a:rPr lang="ja-JP" altLang="en-US" sz="2400" dirty="0"/>
-              <a:t>使いやすいように機能を</a:t>
-            </a:r>
-            <a:r>
-              <a:rPr lang="ja-JP" altLang="en-US" sz="2400" b="1" dirty="0">
-                <a:solidFill>
-                  <a:srgbClr val="FF0000"/>
-                </a:solidFill>
-              </a:rPr>
-              <a:t>ラップ</a:t>
-            </a:r>
-            <a:r>
-              <a:rPr lang="ja-JP" altLang="en-US" sz="2400" dirty="0"/>
-              <a:t>したものを用意すると使いやすくなります。</a:t>
+              <a:t>を書きます。</a:t>
             </a:r>
             <a:endParaRPr lang="en-US" altLang="ja-JP" sz="2400" dirty="0"/>
           </a:p>
@@ -6770,7 +4272,7 @@
           <p:cNvPr id="3" name="図 2">
             <a:extLst>
               <a:ext uri="{FF2B5EF4-FFF2-40B4-BE49-F238E27FC236}">
-                <a16:creationId xmlns:a16="http://schemas.microsoft.com/office/drawing/2014/main" id="{BE7C29DC-2ACD-4DE6-B8BB-91C0FD555CE9}"/>
+                <a16:creationId xmlns:a16="http://schemas.microsoft.com/office/drawing/2014/main" id="{4DB60800-3A58-4E9F-800B-2BA9BD53E66B}"/>
               </a:ext>
             </a:extLst>
           </p:cNvPr>
@@ -6787,199 +4289,18 @@
         </p:blipFill>
         <p:spPr>
           <a:xfrm>
-            <a:off x="567542" y="2482963"/>
-            <a:ext cx="4587164" cy="2936684"/>
+            <a:off x="567542" y="1817795"/>
+            <a:ext cx="3359504" cy="4548252"/>
           </a:xfrm>
           <a:prstGeom prst="rect">
             <a:avLst/>
           </a:prstGeom>
         </p:spPr>
       </p:pic>
-      <p:sp>
-        <p:nvSpPr>
-          <p:cNvPr id="7" name="テキスト ボックス 6">
-            <a:extLst>
-              <a:ext uri="{FF2B5EF4-FFF2-40B4-BE49-F238E27FC236}">
-                <a16:creationId xmlns:a16="http://schemas.microsoft.com/office/drawing/2014/main" id="{6BF0662C-341A-4927-ACD5-5EC89B10F276}"/>
-              </a:ext>
-            </a:extLst>
-          </p:cNvPr>
-          <p:cNvSpPr txBox="1"/>
-          <p:nvPr/>
-        </p:nvSpPr>
-        <p:spPr>
-          <a:xfrm>
-            <a:off x="529885" y="2151004"/>
-            <a:ext cx="1306768" cy="369332"/>
-          </a:xfrm>
-          <a:prstGeom prst="rect">
-            <a:avLst/>
-          </a:prstGeom>
-          <a:noFill/>
-        </p:spPr>
-        <p:txBody>
-          <a:bodyPr wrap="none" rtlCol="0">
-            <a:spAutoFit/>
-          </a:bodyPr>
-          <a:lstStyle/>
-          <a:p>
-            <a:r>
-              <a:rPr lang="en-US" altLang="ja-JP" b="1" dirty="0" err="1">
-                <a:solidFill>
-                  <a:srgbClr val="FF0000"/>
-                </a:solidFill>
-              </a:rPr>
-              <a:t>Memory.h</a:t>
-            </a:r>
-            <a:endParaRPr lang="en-US" altLang="ja-JP" b="1" dirty="0">
-              <a:solidFill>
-                <a:srgbClr val="FF0000"/>
-              </a:solidFill>
-            </a:endParaRPr>
-          </a:p>
-        </p:txBody>
-      </p:sp>
-      <p:pic>
-        <p:nvPicPr>
-          <p:cNvPr id="8" name="図 7">
-            <a:extLst>
-              <a:ext uri="{FF2B5EF4-FFF2-40B4-BE49-F238E27FC236}">
-                <a16:creationId xmlns:a16="http://schemas.microsoft.com/office/drawing/2014/main" id="{79B9E857-CD06-4EEB-9058-4A81643274DC}"/>
-              </a:ext>
-            </a:extLst>
-          </p:cNvPr>
-          <p:cNvPicPr>
-            <a:picLocks noChangeAspect="1"/>
-          </p:cNvPicPr>
-          <p:nvPr/>
-        </p:nvPicPr>
-        <p:blipFill>
-          <a:blip r:embed="rId3"/>
-          <a:stretch>
-            <a:fillRect/>
-          </a:stretch>
-        </p:blipFill>
-        <p:spPr>
-          <a:xfrm>
-            <a:off x="5864300" y="2520336"/>
-            <a:ext cx="5153323" cy="1905168"/>
-          </a:xfrm>
-          <a:prstGeom prst="rect">
-            <a:avLst/>
-          </a:prstGeom>
-        </p:spPr>
-      </p:pic>
-      <p:sp>
-        <p:nvSpPr>
-          <p:cNvPr id="9" name="テキスト ボックス 8">
-            <a:extLst>
-              <a:ext uri="{FF2B5EF4-FFF2-40B4-BE49-F238E27FC236}">
-                <a16:creationId xmlns:a16="http://schemas.microsoft.com/office/drawing/2014/main" id="{9F721CC0-1FA9-420C-A1F4-DBAE1A2AD820}"/>
-              </a:ext>
-            </a:extLst>
-          </p:cNvPr>
-          <p:cNvSpPr txBox="1"/>
-          <p:nvPr/>
-        </p:nvSpPr>
-        <p:spPr>
-          <a:xfrm>
-            <a:off x="5864300" y="2151004"/>
-            <a:ext cx="1367682" cy="369332"/>
-          </a:xfrm>
-          <a:prstGeom prst="rect">
-            <a:avLst/>
-          </a:prstGeom>
-          <a:noFill/>
-        </p:spPr>
-        <p:txBody>
-          <a:bodyPr wrap="none" rtlCol="0">
-            <a:spAutoFit/>
-          </a:bodyPr>
-          <a:lstStyle/>
-          <a:p>
-            <a:r>
-              <a:rPr lang="en-US" altLang="ja-JP" b="1" dirty="0">
-                <a:solidFill>
-                  <a:srgbClr val="FF0000"/>
-                </a:solidFill>
-              </a:rPr>
-              <a:t>Player.cpp</a:t>
-            </a:r>
-          </a:p>
-        </p:txBody>
-      </p:sp>
-      <p:sp>
-        <p:nvSpPr>
-          <p:cNvPr id="10" name="テキスト ボックス 9">
-            <a:extLst>
-              <a:ext uri="{FF2B5EF4-FFF2-40B4-BE49-F238E27FC236}">
-                <a16:creationId xmlns:a16="http://schemas.microsoft.com/office/drawing/2014/main" id="{76B4E576-C835-44F3-8604-49E5FAB1A129}"/>
-              </a:ext>
-            </a:extLst>
-          </p:cNvPr>
-          <p:cNvSpPr txBox="1"/>
-          <p:nvPr/>
-        </p:nvSpPr>
-        <p:spPr>
-          <a:xfrm>
-            <a:off x="567542" y="5779752"/>
-            <a:ext cx="8390438" cy="461665"/>
-          </a:xfrm>
-          <a:prstGeom prst="rect">
-            <a:avLst/>
-          </a:prstGeom>
-          <a:noFill/>
-        </p:spPr>
-        <p:txBody>
-          <a:bodyPr wrap="none" rtlCol="0">
-            <a:spAutoFit/>
-          </a:bodyPr>
-          <a:lstStyle/>
-          <a:p>
-            <a:r>
-              <a:rPr lang="en-US" altLang="ja-JP" sz="2400" b="1" dirty="0">
-                <a:solidFill>
-                  <a:srgbClr val="00B050"/>
-                </a:solidFill>
-              </a:rPr>
-              <a:t>array</a:t>
-            </a:r>
-            <a:r>
-              <a:rPr lang="en-US" altLang="ja-JP" sz="2400" dirty="0"/>
-              <a:t>, </a:t>
-            </a:r>
-            <a:r>
-              <a:rPr lang="en-US" altLang="ja-JP" sz="2400" b="1" dirty="0">
-                <a:solidFill>
-                  <a:srgbClr val="00B050"/>
-                </a:solidFill>
-              </a:rPr>
-              <a:t>vector</a:t>
-            </a:r>
-            <a:r>
-              <a:rPr lang="en-US" altLang="ja-JP" sz="2400" dirty="0"/>
-              <a:t>, </a:t>
-            </a:r>
-            <a:r>
-              <a:rPr lang="en-US" altLang="ja-JP" sz="2400" b="1" dirty="0">
-                <a:solidFill>
-                  <a:srgbClr val="00B050"/>
-                </a:solidFill>
-              </a:rPr>
-              <a:t>list</a:t>
-            </a:r>
-            <a:r>
-              <a:rPr lang="ja-JP" altLang="en-US" sz="2400" dirty="0"/>
-              <a:t>もこんな風にすると使いやすくなるかも</a:t>
-            </a:r>
-            <a:endParaRPr lang="en-US" altLang="ja-JP" sz="2400" dirty="0"/>
-          </a:p>
-        </p:txBody>
-      </p:sp>
     </p:spTree>
     <p:extLst>
       <p:ext uri="{BB962C8B-B14F-4D97-AF65-F5344CB8AC3E}">
-        <p14:creationId xmlns:p14="http://schemas.microsoft.com/office/powerpoint/2010/main" val="2534601404"/>
+        <p14:creationId xmlns:p14="http://schemas.microsoft.com/office/powerpoint/2010/main" val="3354656821"/>
       </p:ext>
     </p:extLst>
   </p:cSld>
@@ -7021,7 +4342,7 @@
         <p:spPr>
           <a:xfrm>
             <a:off x="567542" y="491954"/>
-            <a:ext cx="3877985" cy="584775"/>
+            <a:ext cx="3057247" cy="584775"/>
           </a:xfrm>
           <a:prstGeom prst="rect">
             <a:avLst/>
@@ -7036,7 +4357,7 @@
           <a:p>
             <a:r>
               <a:rPr lang="ja-JP" altLang="en-US" sz="3200" b="1" u="sng" dirty="0"/>
-              <a:t>スマートポインター</a:t>
+              <a:t>マルチスレッド</a:t>
             </a:r>
             <a:endParaRPr kumimoji="1" lang="ja-JP" altLang="en-US" sz="3200" b="1" u="sng" dirty="0"/>
           </a:p>
@@ -7057,7 +4378,7 @@
         <p:spPr>
           <a:xfrm>
             <a:off x="567542" y="1216429"/>
-            <a:ext cx="11572399" cy="5262979"/>
+            <a:ext cx="9417963" cy="1200329"/>
           </a:xfrm>
           <a:prstGeom prst="rect">
             <a:avLst/>
@@ -7072,7 +4393,15 @@
           <a:p>
             <a:r>
               <a:rPr lang="ja-JP" altLang="en-US" sz="2400" dirty="0"/>
-              <a:t>スマートポインターを学習するためには</a:t>
+              <a:t>マルチスレッド機能を使うには</a:t>
+            </a:r>
+            <a:r>
+              <a:rPr lang="en-US" altLang="ja-JP" sz="2400" b="1" dirty="0">
+                <a:solidFill>
+                  <a:srgbClr val="FF0000"/>
+                </a:solidFill>
+              </a:rPr>
+              <a:t>thread</a:t>
             </a:r>
             <a:r>
               <a:rPr lang="ja-JP" altLang="en-US" sz="2400" b="1" dirty="0">
@@ -7080,337 +4409,187 @@
                   <a:srgbClr val="FF0000"/>
                 </a:solidFill>
               </a:rPr>
-              <a:t>所有権</a:t>
+              <a:t>クラス</a:t>
             </a:r>
             <a:r>
               <a:rPr lang="ja-JP" altLang="en-US" sz="2400" dirty="0"/>
-              <a:t>について知らなければいけません。</a:t>
+              <a:t>を使います。</a:t>
             </a:r>
             <a:endParaRPr lang="en-US" altLang="ja-JP" sz="2400" dirty="0"/>
           </a:p>
           <a:p>
             <a:r>
+              <a:rPr lang="en-US" altLang="ja-JP" sz="2400" b="1" dirty="0">
+                <a:solidFill>
+                  <a:srgbClr val="00B050"/>
+                </a:solidFill>
+              </a:rPr>
+              <a:t>thread</a:t>
+            </a:r>
+            <a:r>
+              <a:rPr lang="ja-JP" altLang="en-US" sz="2400" b="1" dirty="0">
+                <a:solidFill>
+                  <a:srgbClr val="00B050"/>
+                </a:solidFill>
+              </a:rPr>
+              <a:t>クラス</a:t>
+            </a:r>
+            <a:r>
               <a:rPr lang="ja-JP" altLang="en-US" sz="2400" dirty="0"/>
-              <a:t>つまり、生成したオブジェクトを所有するという概念があります。</a:t>
+              <a:t>は</a:t>
             </a:r>
             <a:endParaRPr lang="en-US" altLang="ja-JP" sz="2400" dirty="0"/>
           </a:p>
           <a:p>
-            <a:endParaRPr lang="en-US" altLang="ja-JP" sz="2400" dirty="0"/>
-          </a:p>
-          <a:p>
-            <a:endParaRPr lang="en-US" altLang="ja-JP" sz="2400" dirty="0"/>
-          </a:p>
-          <a:p>
-            <a:endParaRPr lang="en-US" altLang="ja-JP" sz="2400" dirty="0"/>
-          </a:p>
-          <a:p>
-            <a:endParaRPr lang="en-US" altLang="ja-JP" sz="2400" dirty="0"/>
-          </a:p>
-          <a:p>
-            <a:endParaRPr lang="en-US" altLang="ja-JP" sz="2400" dirty="0"/>
-          </a:p>
-          <a:p>
-            <a:endParaRPr lang="en-US" altLang="ja-JP" sz="2400" dirty="0"/>
-          </a:p>
-          <a:p>
-            <a:endParaRPr lang="en-US" altLang="ja-JP" sz="2400" dirty="0"/>
-          </a:p>
-          <a:p>
-            <a:endParaRPr lang="en-US" altLang="ja-JP" sz="2400" dirty="0"/>
-          </a:p>
-          <a:p>
-            <a:endParaRPr lang="en-US" altLang="ja-JP" sz="2400" dirty="0"/>
-          </a:p>
-          <a:p>
-            <a:endParaRPr lang="en-US" altLang="ja-JP" sz="2400" dirty="0"/>
-          </a:p>
-          <a:p>
-            <a:endParaRPr lang="en-US" altLang="ja-JP" sz="2400" dirty="0"/>
-          </a:p>
-          <a:p>
-            <a:r>
-              <a:rPr lang="ja-JP" altLang="en-US" sz="2400" dirty="0"/>
-              <a:t>この所有権の扱い方によって</a:t>
-            </a:r>
             <a:r>
               <a:rPr lang="ja-JP" altLang="en-US" sz="2400" b="1" dirty="0">
                 <a:solidFill>
                   <a:srgbClr val="FF0000"/>
                 </a:solidFill>
               </a:rPr>
-              <a:t>３種類</a:t>
+              <a:t>コンストラクタで渡した関数をサブスレッドとして開始</a:t>
             </a:r>
             <a:r>
               <a:rPr lang="ja-JP" altLang="en-US" sz="2400" dirty="0"/>
-              <a:t>のスマートポインターがあります。</a:t>
+              <a:t>します。</a:t>
             </a:r>
             <a:endParaRPr lang="en-US" altLang="ja-JP" sz="2400" dirty="0"/>
           </a:p>
         </p:txBody>
       </p:sp>
-      <p:sp>
-        <p:nvSpPr>
-          <p:cNvPr id="2" name="正方形/長方形 1">
-            <a:extLst>
-              <a:ext uri="{FF2B5EF4-FFF2-40B4-BE49-F238E27FC236}">
-                <a16:creationId xmlns:a16="http://schemas.microsoft.com/office/drawing/2014/main" id="{3D14A422-E20E-4BE3-B1E1-B8E4B48F2683}"/>
-              </a:ext>
-            </a:extLst>
-          </p:cNvPr>
-          <p:cNvSpPr/>
+      <p:pic>
+        <p:nvPicPr>
+          <p:cNvPr id="9" name="図 8">
+            <a:extLst>
+              <a:ext uri="{FF2B5EF4-FFF2-40B4-BE49-F238E27FC236}">
+                <a16:creationId xmlns:a16="http://schemas.microsoft.com/office/drawing/2014/main" id="{7F3C5525-BF3B-496E-8418-9D8B22332589}"/>
+              </a:ext>
+            </a:extLst>
+          </p:cNvPr>
+          <p:cNvPicPr>
+            <a:picLocks noChangeAspect="1"/>
+          </p:cNvPicPr>
           <p:nvPr/>
-        </p:nvSpPr>
+        </p:nvPicPr>
+        <p:blipFill>
+          <a:blip r:embed="rId2"/>
+          <a:stretch>
+            <a:fillRect/>
+          </a:stretch>
+        </p:blipFill>
         <p:spPr>
           <a:xfrm>
-            <a:off x="1058333" y="2353732"/>
-            <a:ext cx="2133600" cy="3412068"/>
+            <a:off x="567541" y="2556458"/>
+            <a:ext cx="2876663" cy="872542"/>
           </a:xfrm>
           <a:prstGeom prst="rect">
             <a:avLst/>
           </a:prstGeom>
         </p:spPr>
-        <p:style>
-          <a:lnRef idx="2">
-            <a:schemeClr val="accent1">
-              <a:shade val="50000"/>
-            </a:schemeClr>
-          </a:lnRef>
-          <a:fillRef idx="1">
-            <a:schemeClr val="accent1"/>
-          </a:fillRef>
-          <a:effectRef idx="0">
-            <a:schemeClr val="accent1"/>
-          </a:effectRef>
-          <a:fontRef idx="minor">
-            <a:schemeClr val="lt1"/>
-          </a:fontRef>
-        </p:style>
-        <p:txBody>
-          <a:bodyPr rtlCol="0" anchor="ctr"/>
-          <a:lstStyle/>
-          <a:p>
-            <a:pPr algn="ctr"/>
-            <a:r>
-              <a:rPr kumimoji="1" lang="en-US" altLang="ja-JP" b="1" dirty="0"/>
-              <a:t>Player</a:t>
-            </a:r>
-            <a:r>
-              <a:rPr kumimoji="1" lang="ja-JP" altLang="en-US" b="1" dirty="0"/>
-              <a:t>クラス</a:t>
-            </a:r>
-          </a:p>
-        </p:txBody>
-      </p:sp>
-      <p:sp>
-        <p:nvSpPr>
-          <p:cNvPr id="3" name="楕円 2">
-            <a:extLst>
-              <a:ext uri="{FF2B5EF4-FFF2-40B4-BE49-F238E27FC236}">
-                <a16:creationId xmlns:a16="http://schemas.microsoft.com/office/drawing/2014/main" id="{DB3DDA2C-7B07-4477-9484-4BBF98B612E1}"/>
-              </a:ext>
-            </a:extLst>
-          </p:cNvPr>
-          <p:cNvSpPr/>
+      </p:pic>
+      <p:sp>
+        <p:nvSpPr>
+          <p:cNvPr id="10" name="テキスト ボックス 9">
+            <a:extLst>
+              <a:ext uri="{FF2B5EF4-FFF2-40B4-BE49-F238E27FC236}">
+                <a16:creationId xmlns:a16="http://schemas.microsoft.com/office/drawing/2014/main" id="{84B65BD0-921E-4631-AB93-49301413C13F}"/>
+              </a:ext>
+            </a:extLst>
+          </p:cNvPr>
+          <p:cNvSpPr txBox="1"/>
           <p:nvPr/>
         </p:nvSpPr>
         <p:spPr>
           <a:xfrm>
-            <a:off x="2048933" y="2717800"/>
-            <a:ext cx="1143000" cy="711200"/>
+            <a:off x="567541" y="3568700"/>
+            <a:ext cx="7263527" cy="1938992"/>
           </a:xfrm>
-          <a:prstGeom prst="ellipse">
+          <a:prstGeom prst="rect">
             <a:avLst/>
           </a:prstGeom>
+          <a:noFill/>
         </p:spPr>
-        <p:style>
-          <a:lnRef idx="2">
-            <a:schemeClr val="accent6">
-              <a:shade val="50000"/>
-            </a:schemeClr>
-          </a:lnRef>
-          <a:fillRef idx="1">
-            <a:schemeClr val="accent6"/>
-          </a:fillRef>
-          <a:effectRef idx="0">
-            <a:schemeClr val="accent6"/>
-          </a:effectRef>
-          <a:fontRef idx="minor">
-            <a:schemeClr val="lt1"/>
-          </a:fontRef>
-        </p:style>
-        <p:txBody>
-          <a:bodyPr rtlCol="0" anchor="ctr"/>
-          <a:lstStyle/>
-          <a:p>
-            <a:pPr algn="ctr"/>
-            <a:r>
-              <a:rPr kumimoji="1" lang="ja-JP" altLang="en-US" b="1" dirty="0"/>
-              <a:t>生成</a:t>
-            </a:r>
-          </a:p>
-        </p:txBody>
-      </p:sp>
-      <p:sp>
-        <p:nvSpPr>
-          <p:cNvPr id="5" name="スクロール: 縦 4">
-            <a:extLst>
-              <a:ext uri="{FF2B5EF4-FFF2-40B4-BE49-F238E27FC236}">
-                <a16:creationId xmlns:a16="http://schemas.microsoft.com/office/drawing/2014/main" id="{88F0AB25-1324-4541-8C4D-9D5003CCB65A}"/>
-              </a:ext>
-            </a:extLst>
-          </p:cNvPr>
-          <p:cNvSpPr/>
-          <p:nvPr/>
-        </p:nvSpPr>
-        <p:spPr>
-          <a:xfrm>
-            <a:off x="4885267" y="2408767"/>
-            <a:ext cx="1210733" cy="1329266"/>
-          </a:xfrm>
-          <a:prstGeom prst="verticalScroll">
-            <a:avLst/>
-          </a:prstGeom>
-        </p:spPr>
-        <p:style>
-          <a:lnRef idx="2">
-            <a:schemeClr val="accent3">
-              <a:shade val="50000"/>
-            </a:schemeClr>
-          </a:lnRef>
-          <a:fillRef idx="1">
-            <a:schemeClr val="accent3"/>
-          </a:fillRef>
-          <a:effectRef idx="0">
-            <a:schemeClr val="accent3"/>
-          </a:effectRef>
-          <a:fontRef idx="minor">
-            <a:schemeClr val="lt1"/>
-          </a:fontRef>
-        </p:style>
-        <p:txBody>
-          <a:bodyPr rtlCol="0" anchor="ctr"/>
-          <a:lstStyle/>
-          <a:p>
-            <a:pPr algn="ctr"/>
-            <a:r>
-              <a:rPr kumimoji="1" lang="en-US" altLang="ja-JP" b="1" dirty="0"/>
-              <a:t>Player</a:t>
-            </a:r>
-            <a:r>
-              <a:rPr kumimoji="1" lang="ja-JP" altLang="en-US" b="1" dirty="0"/>
-              <a:t>所有権</a:t>
-            </a:r>
-          </a:p>
-        </p:txBody>
-      </p:sp>
-      <p:sp>
-        <p:nvSpPr>
-          <p:cNvPr id="7" name="矢印: 右 6">
-            <a:extLst>
-              <a:ext uri="{FF2B5EF4-FFF2-40B4-BE49-F238E27FC236}">
-                <a16:creationId xmlns:a16="http://schemas.microsoft.com/office/drawing/2014/main" id="{4732FD01-0FBF-4A94-8888-955AD1926563}"/>
-              </a:ext>
-            </a:extLst>
-          </p:cNvPr>
-          <p:cNvSpPr/>
-          <p:nvPr/>
-        </p:nvSpPr>
-        <p:spPr>
-          <a:xfrm>
-            <a:off x="3378200" y="2819400"/>
-            <a:ext cx="1380067" cy="609600"/>
-          </a:xfrm>
-          <a:prstGeom prst="rightArrow">
-            <a:avLst/>
-          </a:prstGeom>
-          <a:solidFill>
-            <a:srgbClr val="FF0000"/>
-          </a:solidFill>
-          <a:ln>
-            <a:solidFill>
-              <a:schemeClr val="tx1"/>
-            </a:solidFill>
-          </a:ln>
-        </p:spPr>
-        <p:style>
-          <a:lnRef idx="2">
-            <a:schemeClr val="accent1">
-              <a:shade val="50000"/>
-            </a:schemeClr>
-          </a:lnRef>
-          <a:fillRef idx="1">
-            <a:schemeClr val="accent1"/>
-          </a:fillRef>
-          <a:effectRef idx="0">
-            <a:schemeClr val="accent1"/>
-          </a:effectRef>
-          <a:fontRef idx="minor">
-            <a:schemeClr val="lt1"/>
-          </a:fontRef>
-        </p:style>
-        <p:txBody>
-          <a:bodyPr rtlCol="0" anchor="ctr"/>
-          <a:lstStyle/>
-          <a:p>
-            <a:pPr algn="ctr"/>
-            <a:endParaRPr kumimoji="1" lang="ja-JP" altLang="en-US"/>
-          </a:p>
-        </p:txBody>
-      </p:sp>
-      <p:sp>
-        <p:nvSpPr>
-          <p:cNvPr id="8" name="フローチャート: 代替処理 7">
-            <a:extLst>
-              <a:ext uri="{FF2B5EF4-FFF2-40B4-BE49-F238E27FC236}">
-                <a16:creationId xmlns:a16="http://schemas.microsoft.com/office/drawing/2014/main" id="{069D3D52-747B-4139-90D8-49A7C984CEE8}"/>
-              </a:ext>
-            </a:extLst>
-          </p:cNvPr>
-          <p:cNvSpPr/>
-          <p:nvPr/>
-        </p:nvSpPr>
-        <p:spPr>
-          <a:xfrm>
-            <a:off x="5715000" y="3429000"/>
-            <a:ext cx="2489200" cy="537634"/>
-          </a:xfrm>
-          <a:prstGeom prst="flowChartAlternateProcess">
-            <a:avLst/>
-          </a:prstGeom>
-        </p:spPr>
-        <p:style>
-          <a:lnRef idx="2">
-            <a:schemeClr val="accent4">
-              <a:shade val="50000"/>
-            </a:schemeClr>
-          </a:lnRef>
-          <a:fillRef idx="1">
-            <a:schemeClr val="accent4"/>
-          </a:fillRef>
-          <a:effectRef idx="0">
-            <a:schemeClr val="accent4"/>
-          </a:effectRef>
-          <a:fontRef idx="minor">
-            <a:schemeClr val="lt1"/>
-          </a:fontRef>
-        </p:style>
-        <p:txBody>
-          <a:bodyPr rtlCol="0" anchor="ctr"/>
-          <a:lstStyle/>
-          <a:p>
-            <a:pPr algn="ctr"/>
-            <a:r>
-              <a:rPr kumimoji="1" lang="ja-JP" altLang="en-US" b="1" dirty="0"/>
-              <a:t>スマートポインター</a:t>
-            </a:r>
+        <p:txBody>
+          <a:bodyPr wrap="none" rtlCol="0">
+            <a:spAutoFit/>
+          </a:bodyPr>
+          <a:lstStyle/>
+          <a:p>
+            <a:r>
+              <a:rPr lang="ja-JP" altLang="en-US" sz="2400" dirty="0"/>
+              <a:t>この時から</a:t>
+            </a:r>
+            <a:r>
+              <a:rPr lang="en-US" altLang="ja-JP" sz="2400" b="1" dirty="0">
+                <a:solidFill>
+                  <a:srgbClr val="0070C0"/>
+                </a:solidFill>
+              </a:rPr>
+              <a:t>sub</a:t>
+            </a:r>
+            <a:r>
+              <a:rPr lang="ja-JP" altLang="en-US" sz="2400" dirty="0"/>
+              <a:t>が始まります。</a:t>
+            </a:r>
+            <a:endParaRPr lang="en-US" altLang="ja-JP" sz="2400" dirty="0"/>
+          </a:p>
+          <a:p>
+            <a:endParaRPr lang="en-US" altLang="ja-JP" sz="2400" dirty="0"/>
+          </a:p>
+          <a:p>
+            <a:r>
+              <a:rPr lang="en-US" altLang="ja-JP" sz="2400" b="1" dirty="0">
+                <a:solidFill>
+                  <a:srgbClr val="00B050"/>
+                </a:solidFill>
+              </a:rPr>
+              <a:t>MEMO</a:t>
+            </a:r>
+          </a:p>
+          <a:p>
+            <a:r>
+              <a:rPr lang="ja-JP" altLang="en-US" sz="2400" dirty="0"/>
+              <a:t>もともと動いていた処理のことを</a:t>
+            </a:r>
+            <a:r>
+              <a:rPr lang="ja-JP" altLang="en-US" sz="2400" b="1" dirty="0">
+                <a:solidFill>
+                  <a:srgbClr val="FF0000"/>
+                </a:solidFill>
+              </a:rPr>
+              <a:t>メインスレッド</a:t>
+            </a:r>
+            <a:r>
+              <a:rPr lang="ja-JP" altLang="en-US" sz="2400" dirty="0"/>
+              <a:t>、</a:t>
+            </a:r>
+            <a:endParaRPr lang="en-US" altLang="ja-JP" sz="2400" dirty="0"/>
+          </a:p>
+          <a:p>
+            <a:r>
+              <a:rPr lang="ja-JP" altLang="en-US" sz="2400" dirty="0"/>
+              <a:t>追加された処理のことを</a:t>
+            </a:r>
+            <a:r>
+              <a:rPr lang="ja-JP" altLang="en-US" sz="2400" b="1" dirty="0">
+                <a:solidFill>
+                  <a:srgbClr val="FF0000"/>
+                </a:solidFill>
+              </a:rPr>
+              <a:t>サブスレッド</a:t>
+            </a:r>
+            <a:r>
+              <a:rPr lang="ja-JP" altLang="en-US" sz="2400" dirty="0"/>
+              <a:t>と言います。</a:t>
+            </a:r>
+            <a:endParaRPr lang="en-US" altLang="ja-JP" sz="2400" dirty="0"/>
           </a:p>
         </p:txBody>
       </p:sp>
     </p:spTree>
     <p:extLst>
       <p:ext uri="{BB962C8B-B14F-4D97-AF65-F5344CB8AC3E}">
-        <p14:creationId xmlns:p14="http://schemas.microsoft.com/office/powerpoint/2010/main" val="965973403"/>
+        <p14:creationId xmlns:p14="http://schemas.microsoft.com/office/powerpoint/2010/main" val="1914201016"/>
       </p:ext>
     </p:extLst>
   </p:cSld>
@@ -7452,7 +4631,7 @@
         <p:spPr>
           <a:xfrm>
             <a:off x="567542" y="491954"/>
-            <a:ext cx="3877985" cy="584775"/>
+            <a:ext cx="3057247" cy="584775"/>
           </a:xfrm>
           <a:prstGeom prst="rect">
             <a:avLst/>
@@ -7467,7 +4646,7 @@
           <a:p>
             <a:r>
               <a:rPr lang="ja-JP" altLang="en-US" sz="3200" b="1" u="sng" dirty="0"/>
-              <a:t>スマートポインター</a:t>
+              <a:t>マルチスレッド</a:t>
             </a:r>
             <a:endParaRPr kumimoji="1" lang="ja-JP" altLang="en-US" sz="3200" b="1" u="sng" dirty="0"/>
           </a:p>
@@ -7488,7 +4667,7 @@
         <p:spPr>
           <a:xfrm>
             <a:off x="567542" y="1216429"/>
-            <a:ext cx="10730823" cy="5262979"/>
+            <a:ext cx="8799204" cy="830997"/>
           </a:xfrm>
           <a:prstGeom prst="rect">
             <a:avLst/>
@@ -7502,215 +4681,145 @@
           <a:lstStyle/>
           <a:p>
             <a:r>
-              <a:rPr lang="ja-JP" altLang="en-US" sz="2400" dirty="0"/>
-              <a:t>スマートポインターの種類です。</a:t>
-            </a:r>
-            <a:endParaRPr lang="en-US" altLang="ja-JP" sz="2400" dirty="0"/>
-          </a:p>
-          <a:p>
-            <a:endParaRPr lang="en-US" altLang="ja-JP" sz="2400" dirty="0"/>
-          </a:p>
-          <a:p>
-            <a:r>
-              <a:rPr lang="ja-JP" altLang="en-US" sz="2400" b="1" dirty="0">
-                <a:solidFill>
-                  <a:srgbClr val="00B050"/>
-                </a:solidFill>
-              </a:rPr>
-              <a:t>■</a:t>
-            </a:r>
-            <a:r>
               <a:rPr lang="en-US" altLang="ja-JP" sz="2400" b="1" dirty="0">
                 <a:solidFill>
                   <a:srgbClr val="00B050"/>
                 </a:solidFill>
               </a:rPr>
-              <a:t>Unique</a:t>
-            </a:r>
-            <a:r>
-              <a:rPr lang="ja-JP" altLang="en-US" sz="2400" b="1" dirty="0">
+              <a:t>thread</a:t>
+            </a:r>
+            <a:r>
+              <a:rPr lang="ja-JP" altLang="en-US" sz="2400" dirty="0"/>
+              <a:t>のメンバ関数</a:t>
+            </a:r>
+            <a:r>
+              <a:rPr lang="en-US" altLang="ja-JP" sz="2400" b="1" dirty="0">
                 <a:solidFill>
-                  <a:srgbClr val="00B050"/>
+                  <a:srgbClr val="0070C0"/>
                 </a:solidFill>
               </a:rPr>
-              <a:t>（ユニーク）</a:t>
-            </a:r>
-            <a:endParaRPr lang="en-US" altLang="ja-JP" sz="2400" b="1" dirty="0">
-              <a:solidFill>
-                <a:srgbClr val="00B050"/>
-              </a:solidFill>
-            </a:endParaRPr>
-          </a:p>
-          <a:p>
+              <a:t>join</a:t>
+            </a:r>
+            <a:r>
+              <a:rPr lang="ja-JP" altLang="en-US" sz="2400" dirty="0"/>
+              <a:t>はサブスレッドの終了待ち関数です。</a:t>
+            </a:r>
+            <a:endParaRPr lang="en-US" altLang="ja-JP" sz="2400" dirty="0"/>
+          </a:p>
+          <a:p>
+            <a:r>
+              <a:rPr lang="en-US" altLang="ja-JP" sz="2400" b="1" dirty="0">
+                <a:solidFill>
+                  <a:srgbClr val="0070C0"/>
+                </a:solidFill>
+              </a:rPr>
+              <a:t>sub</a:t>
+            </a:r>
+            <a:r>
+              <a:rPr lang="ja-JP" altLang="en-US" sz="2400" dirty="0"/>
+              <a:t>が終わるまでここで待つことになります。</a:t>
+            </a:r>
+            <a:endParaRPr lang="en-US" altLang="ja-JP" sz="2400" dirty="0"/>
+          </a:p>
+        </p:txBody>
+      </p:sp>
+      <p:pic>
+        <p:nvPicPr>
+          <p:cNvPr id="3" name="図 2">
+            <a:extLst>
+              <a:ext uri="{FF2B5EF4-FFF2-40B4-BE49-F238E27FC236}">
+                <a16:creationId xmlns:a16="http://schemas.microsoft.com/office/drawing/2014/main" id="{C2049379-B95E-420C-B322-91A7DE4BCC87}"/>
+              </a:ext>
+            </a:extLst>
+          </p:cNvPr>
+          <p:cNvPicPr>
+            <a:picLocks noChangeAspect="1"/>
+          </p:cNvPicPr>
+          <p:nvPr/>
+        </p:nvPicPr>
+        <p:blipFill>
+          <a:blip r:embed="rId2"/>
+          <a:stretch>
+            <a:fillRect/>
+          </a:stretch>
+        </p:blipFill>
+        <p:spPr>
+          <a:xfrm>
+            <a:off x="567542" y="2187126"/>
+            <a:ext cx="3309394" cy="945541"/>
+          </a:xfrm>
+          <a:prstGeom prst="rect">
+            <a:avLst/>
+          </a:prstGeom>
+        </p:spPr>
+      </p:pic>
+      <p:sp>
+        <p:nvSpPr>
+          <p:cNvPr id="8" name="テキスト ボックス 7">
+            <a:extLst>
+              <a:ext uri="{FF2B5EF4-FFF2-40B4-BE49-F238E27FC236}">
+                <a16:creationId xmlns:a16="http://schemas.microsoft.com/office/drawing/2014/main" id="{6FE8B4C6-CDF2-4D5A-9D9F-D3DFB17CDE1E}"/>
+              </a:ext>
+            </a:extLst>
+          </p:cNvPr>
+          <p:cNvSpPr txBox="1"/>
+          <p:nvPr/>
+        </p:nvSpPr>
+        <p:spPr>
+          <a:xfrm>
+            <a:off x="567542" y="3272367"/>
+            <a:ext cx="10649069" cy="1938992"/>
+          </a:xfrm>
+          <a:prstGeom prst="rect">
+            <a:avLst/>
+          </a:prstGeom>
+          <a:noFill/>
+        </p:spPr>
+        <p:txBody>
+          <a:bodyPr wrap="none" rtlCol="0">
+            <a:spAutoFit/>
+          </a:bodyPr>
+          <a:lstStyle/>
+          <a:p>
+            <a:r>
+              <a:rPr lang="ja-JP" altLang="en-US" sz="2400" dirty="0"/>
+              <a:t>サブスレッドが終了する前にメインスレッドが終了すると、</a:t>
+            </a:r>
+            <a:endParaRPr lang="en-US" altLang="ja-JP" sz="2400" dirty="0"/>
+          </a:p>
+          <a:p>
+            <a:r>
+              <a:rPr lang="ja-JP" altLang="en-US" sz="2400" dirty="0"/>
+              <a:t>エラーが発生します。</a:t>
+            </a:r>
+            <a:endParaRPr lang="en-US" altLang="ja-JP" sz="2400" dirty="0"/>
+          </a:p>
+          <a:p>
+            <a:r>
+              <a:rPr lang="ja-JP" altLang="en-US" sz="2400" dirty="0"/>
+              <a:t>サブスレッドを使う場合は必ず</a:t>
+            </a:r>
             <a:r>
               <a:rPr lang="ja-JP" altLang="en-US" sz="2400" b="1" dirty="0">
                 <a:solidFill>
                   <a:srgbClr val="FF0000"/>
                 </a:solidFill>
               </a:rPr>
-              <a:t>所有権が１つ</a:t>
+              <a:t>終了タイミングを意識</a:t>
             </a:r>
             <a:r>
               <a:rPr lang="ja-JP" altLang="en-US" sz="2400" dirty="0"/>
-              <a:t>しかない。</a:t>
+              <a:t>する必要があります。</a:t>
             </a:r>
             <a:endParaRPr lang="en-US" altLang="ja-JP" sz="2400" dirty="0"/>
           </a:p>
           <a:p>
+            <a:endParaRPr lang="en-US" altLang="ja-JP" sz="2400" dirty="0"/>
+          </a:p>
+          <a:p>
             <a:r>
               <a:rPr lang="ja-JP" altLang="en-US" sz="2400" dirty="0"/>
-              <a:t>最も安全なため、よく使われる。</a:t>
-            </a:r>
-            <a:endParaRPr lang="en-US" altLang="ja-JP" sz="2400" dirty="0"/>
-          </a:p>
-          <a:p>
-            <a:endParaRPr lang="en-US" altLang="ja-JP" sz="2400" dirty="0"/>
-          </a:p>
-          <a:p>
-            <a:r>
-              <a:rPr lang="ja-JP" altLang="en-US" sz="2400" b="1" dirty="0">
-                <a:solidFill>
-                  <a:srgbClr val="00B050"/>
-                </a:solidFill>
-              </a:rPr>
-              <a:t>■</a:t>
-            </a:r>
-            <a:r>
-              <a:rPr lang="en-US" altLang="ja-JP" sz="2400" b="1" dirty="0">
-                <a:solidFill>
-                  <a:srgbClr val="00B050"/>
-                </a:solidFill>
-              </a:rPr>
-              <a:t>Shared</a:t>
-            </a:r>
-            <a:r>
-              <a:rPr lang="ja-JP" altLang="en-US" sz="2400" b="1" dirty="0">
-                <a:solidFill>
-                  <a:srgbClr val="00B050"/>
-                </a:solidFill>
-              </a:rPr>
-              <a:t>（シェアード）</a:t>
-            </a:r>
-            <a:endParaRPr lang="en-US" altLang="ja-JP" sz="2400" b="1" dirty="0">
-              <a:solidFill>
-                <a:srgbClr val="00B050"/>
-              </a:solidFill>
-            </a:endParaRPr>
-          </a:p>
-          <a:p>
-            <a:r>
-              <a:rPr lang="ja-JP" altLang="en-US" sz="2400" b="1" dirty="0">
-                <a:solidFill>
-                  <a:srgbClr val="FF0000"/>
-                </a:solidFill>
-              </a:rPr>
-              <a:t>所有権を複数設けられる。</a:t>
-            </a:r>
-            <a:endParaRPr lang="en-US" altLang="ja-JP" sz="2400" b="1" dirty="0">
-              <a:solidFill>
-                <a:srgbClr val="FF0000"/>
-              </a:solidFill>
-            </a:endParaRPr>
-          </a:p>
-          <a:p>
-            <a:r>
-              <a:rPr lang="ja-JP" altLang="en-US" sz="2400" dirty="0"/>
-              <a:t>１つのオブジェクトを様々な場所から参照したい時に使う。</a:t>
-            </a:r>
-            <a:endParaRPr lang="en-US" altLang="ja-JP" sz="2400" dirty="0"/>
-          </a:p>
-          <a:p>
-            <a:r>
-              <a:rPr lang="ja-JP" altLang="en-US" sz="2400" b="1" dirty="0">
-                <a:solidFill>
-                  <a:srgbClr val="FF0000"/>
-                </a:solidFill>
-              </a:rPr>
-              <a:t>せっかくの自動</a:t>
-            </a:r>
-            <a:r>
-              <a:rPr lang="en-US" altLang="ja-JP" sz="2400" b="1" dirty="0">
-                <a:solidFill>
-                  <a:srgbClr val="FF0000"/>
-                </a:solidFill>
-              </a:rPr>
-              <a:t>delete</a:t>
-            </a:r>
-            <a:r>
-              <a:rPr lang="ja-JP" altLang="en-US" sz="2400" b="1" dirty="0">
-                <a:solidFill>
-                  <a:srgbClr val="FF0000"/>
-                </a:solidFill>
-              </a:rPr>
-              <a:t>が機能しなくなるリスクがある（循環参照）</a:t>
-            </a:r>
-            <a:endParaRPr lang="en-US" altLang="ja-JP" sz="2400" b="1" dirty="0">
-              <a:solidFill>
-                <a:srgbClr val="FF0000"/>
-              </a:solidFill>
-            </a:endParaRPr>
-          </a:p>
-          <a:p>
-            <a:endParaRPr lang="en-US" altLang="ja-JP" sz="2400" dirty="0"/>
-          </a:p>
-          <a:p>
-            <a:r>
-              <a:rPr lang="ja-JP" altLang="en-US" sz="2400" b="1" dirty="0">
-                <a:solidFill>
-                  <a:srgbClr val="00B050"/>
-                </a:solidFill>
-              </a:rPr>
-              <a:t>■</a:t>
-            </a:r>
-            <a:r>
-              <a:rPr lang="en-US" altLang="ja-JP" sz="2400" b="1" dirty="0">
-                <a:solidFill>
-                  <a:srgbClr val="00B050"/>
-                </a:solidFill>
-              </a:rPr>
-              <a:t>Weak</a:t>
-            </a:r>
-            <a:r>
-              <a:rPr lang="ja-JP" altLang="en-US" sz="2400" b="1" dirty="0">
-                <a:solidFill>
-                  <a:srgbClr val="00B050"/>
-                </a:solidFill>
-              </a:rPr>
-              <a:t>（ウィーク）</a:t>
-            </a:r>
-            <a:endParaRPr lang="en-US" altLang="ja-JP" sz="2400" b="1" dirty="0">
-              <a:solidFill>
-                <a:srgbClr val="00B050"/>
-              </a:solidFill>
-            </a:endParaRPr>
-          </a:p>
-          <a:p>
-            <a:r>
-              <a:rPr lang="en-US" altLang="ja-JP" sz="2400" dirty="0"/>
-              <a:t>Shared</a:t>
-            </a:r>
-            <a:r>
-              <a:rPr lang="ja-JP" altLang="en-US" sz="2400" dirty="0"/>
-              <a:t>ポインターと同じオブジェクトを参照できるが、</a:t>
-            </a:r>
-            <a:r>
-              <a:rPr lang="ja-JP" altLang="en-US" sz="2400" b="1" dirty="0">
-                <a:solidFill>
-                  <a:srgbClr val="FF0000"/>
-                </a:solidFill>
-              </a:rPr>
-              <a:t>所有権は持たない。</a:t>
-            </a:r>
-            <a:endParaRPr lang="en-US" altLang="ja-JP" sz="2400" b="1" dirty="0">
-              <a:solidFill>
-                <a:srgbClr val="FF0000"/>
-              </a:solidFill>
-            </a:endParaRPr>
-          </a:p>
-          <a:p>
-            <a:r>
-              <a:rPr lang="ja-JP" altLang="en-US" sz="2400" dirty="0"/>
-              <a:t>循環参照に対する対策として効果的。</a:t>
+              <a:t>それでは、実際の動きを確認していきます。</a:t>
             </a:r>
             <a:endParaRPr lang="en-US" altLang="ja-JP" sz="2400" dirty="0"/>
           </a:p>
@@ -7719,7 +4828,7 @@
     </p:spTree>
     <p:extLst>
       <p:ext uri="{BB962C8B-B14F-4D97-AF65-F5344CB8AC3E}">
-        <p14:creationId xmlns:p14="http://schemas.microsoft.com/office/powerpoint/2010/main" val="3678186606"/>
+        <p14:creationId xmlns:p14="http://schemas.microsoft.com/office/powerpoint/2010/main" val="821798574"/>
       </p:ext>
     </p:extLst>
   </p:cSld>
@@ -7761,7 +4870,7 @@
         <p:spPr>
           <a:xfrm>
             <a:off x="567542" y="491954"/>
-            <a:ext cx="3877985" cy="584775"/>
+            <a:ext cx="3057247" cy="584775"/>
           </a:xfrm>
           <a:prstGeom prst="rect">
             <a:avLst/>
@@ -7776,7 +4885,7 @@
           <a:p>
             <a:r>
               <a:rPr lang="ja-JP" altLang="en-US" sz="3200" b="1" u="sng" dirty="0"/>
-              <a:t>スマートポインター</a:t>
+              <a:t>マルチスレッド</a:t>
             </a:r>
             <a:endParaRPr kumimoji="1" lang="ja-JP" altLang="en-US" sz="3200" b="1" u="sng" dirty="0"/>
           </a:p>
@@ -7797,7 +4906,7 @@
         <p:spPr>
           <a:xfrm>
             <a:off x="567542" y="1216429"/>
-            <a:ext cx="4277133" cy="461665"/>
+            <a:ext cx="8342348" cy="461665"/>
           </a:xfrm>
           <a:prstGeom prst="rect">
             <a:avLst/>
@@ -7811,12 +4920,20 @@
           <a:lstStyle/>
           <a:p>
             <a:r>
-              <a:rPr lang="en-US" altLang="ja-JP" sz="2400" dirty="0"/>
-              <a:t>Unique</a:t>
-            </a:r>
-            <a:r>
               <a:rPr lang="ja-JP" altLang="en-US" sz="2400" dirty="0"/>
-              <a:t>から練習しましょう。</a:t>
+              <a:t>別プロジェクトを作成し</a:t>
+            </a:r>
+            <a:r>
+              <a:rPr lang="en-US" altLang="ja-JP" sz="2400" b="1" dirty="0">
+                <a:solidFill>
+                  <a:srgbClr val="FF0000"/>
+                </a:solidFill>
+              </a:rPr>
+              <a:t>Main.cpp</a:t>
+            </a:r>
+            <a:r>
+              <a:rPr lang="ja-JP" altLang="en-US" sz="2400" dirty="0"/>
+              <a:t>を書きます。（その１）</a:t>
             </a:r>
             <a:endParaRPr lang="en-US" altLang="ja-JP" sz="2400" dirty="0"/>
           </a:p>
@@ -7824,10 +4941,10 @@
       </p:sp>
       <p:pic>
         <p:nvPicPr>
-          <p:cNvPr id="3" name="図 2">
-            <a:extLst>
-              <a:ext uri="{FF2B5EF4-FFF2-40B4-BE49-F238E27FC236}">
-                <a16:creationId xmlns:a16="http://schemas.microsoft.com/office/drawing/2014/main" id="{2E783280-FF52-4229-85C9-17434EB167EF}"/>
+          <p:cNvPr id="5" name="図 4">
+            <a:extLst>
+              <a:ext uri="{FF2B5EF4-FFF2-40B4-BE49-F238E27FC236}">
+                <a16:creationId xmlns:a16="http://schemas.microsoft.com/office/drawing/2014/main" id="{0F800994-187B-4C8B-860F-6F59B15EAF85}"/>
               </a:ext>
             </a:extLst>
           </p:cNvPr>
@@ -7844,8 +4961,8 @@
         </p:blipFill>
         <p:spPr>
           <a:xfrm>
-            <a:off x="567542" y="1817794"/>
-            <a:ext cx="5528458" cy="4732360"/>
+            <a:off x="567543" y="1817794"/>
+            <a:ext cx="3320016" cy="4650739"/>
           </a:xfrm>
           <a:prstGeom prst="rect">
             <a:avLst/>
@@ -7855,7 +4972,7 @@
     </p:spTree>
     <p:extLst>
       <p:ext uri="{BB962C8B-B14F-4D97-AF65-F5344CB8AC3E}">
-        <p14:creationId xmlns:p14="http://schemas.microsoft.com/office/powerpoint/2010/main" val="3221719105"/>
+        <p14:creationId xmlns:p14="http://schemas.microsoft.com/office/powerpoint/2010/main" val="2316099108"/>
       </p:ext>
     </p:extLst>
   </p:cSld>
@@ -7897,7 +5014,7 @@
         <p:spPr>
           <a:xfrm>
             <a:off x="567542" y="491954"/>
-            <a:ext cx="3877985" cy="584775"/>
+            <a:ext cx="3057247" cy="584775"/>
           </a:xfrm>
           <a:prstGeom prst="rect">
             <a:avLst/>
@@ -7912,7 +5029,7 @@
           <a:p>
             <a:r>
               <a:rPr lang="ja-JP" altLang="en-US" sz="3200" b="1" u="sng" dirty="0"/>
-              <a:t>スマートポインター</a:t>
+              <a:t>マルチスレッド</a:t>
             </a:r>
             <a:endParaRPr kumimoji="1" lang="ja-JP" altLang="en-US" sz="3200" b="1" u="sng" dirty="0"/>
           </a:p>
@@ -7933,7 +5050,7 @@
         <p:spPr>
           <a:xfrm>
             <a:off x="567542" y="1216429"/>
-            <a:ext cx="10168168" cy="461665"/>
+            <a:ext cx="4956806" cy="461665"/>
           </a:xfrm>
           <a:prstGeom prst="rect">
             <a:avLst/>
@@ -7947,36 +5064,16 @@
           <a:lstStyle/>
           <a:p>
             <a:r>
-              <a:rPr lang="en-US" altLang="ja-JP" sz="2400" b="1" dirty="0" err="1">
+              <a:rPr lang="en-US" altLang="ja-JP" sz="2400" b="1" dirty="0">
                 <a:solidFill>
-                  <a:srgbClr val="0070C0"/>
+                  <a:srgbClr val="FF0000"/>
                 </a:solidFill>
               </a:rPr>
-              <a:t>make_unique</a:t>
-            </a:r>
-            <a:r>
-              <a:rPr lang="ja-JP" altLang="en-US" sz="2400" b="1" dirty="0">
-                <a:solidFill>
-                  <a:srgbClr val="0070C0"/>
-                </a:solidFill>
-              </a:rPr>
-              <a:t>関数</a:t>
+              <a:t>Main.cpp</a:t>
             </a:r>
             <a:r>
               <a:rPr lang="ja-JP" altLang="en-US" sz="2400" dirty="0"/>
-              <a:t>はオブジェクトを生成して</a:t>
-            </a:r>
-            <a:r>
-              <a:rPr lang="en-US" altLang="ja-JP" sz="2400" b="1" dirty="0" err="1">
-                <a:solidFill>
-                  <a:srgbClr val="00B050"/>
-                </a:solidFill>
-              </a:rPr>
-              <a:t>unique_ptr</a:t>
-            </a:r>
-            <a:r>
-              <a:rPr lang="ja-JP" altLang="en-US" sz="2400" dirty="0"/>
-              <a:t>を返却します。</a:t>
+              <a:t>を書きます。（その２）</a:t>
             </a:r>
             <a:endParaRPr lang="en-US" altLang="ja-JP" sz="2400" dirty="0"/>
           </a:p>
@@ -7984,10 +5081,10 @@
       </p:sp>
       <p:pic>
         <p:nvPicPr>
-          <p:cNvPr id="5" name="図 4">
-            <a:extLst>
-              <a:ext uri="{FF2B5EF4-FFF2-40B4-BE49-F238E27FC236}">
-                <a16:creationId xmlns:a16="http://schemas.microsoft.com/office/drawing/2014/main" id="{4F07041D-FCF8-482E-A08B-5548A3BEFEA9}"/>
+          <p:cNvPr id="3" name="図 2">
+            <a:extLst>
+              <a:ext uri="{FF2B5EF4-FFF2-40B4-BE49-F238E27FC236}">
+                <a16:creationId xmlns:a16="http://schemas.microsoft.com/office/drawing/2014/main" id="{78D2A381-099C-4E28-8291-49DC7BCADC57}"/>
               </a:ext>
             </a:extLst>
           </p:cNvPr>
@@ -8005,7 +5102,7 @@
         <p:spPr>
           <a:xfrm>
             <a:off x="567542" y="1817794"/>
-            <a:ext cx="8820254" cy="871618"/>
+            <a:ext cx="4486901" cy="4372585"/>
           </a:xfrm>
           <a:prstGeom prst="rect">
             <a:avLst/>
@@ -8015,7 +5112,7 @@
     </p:spTree>
     <p:extLst>
       <p:ext uri="{BB962C8B-B14F-4D97-AF65-F5344CB8AC3E}">
-        <p14:creationId xmlns:p14="http://schemas.microsoft.com/office/powerpoint/2010/main" val="2880638362"/>
+        <p14:creationId xmlns:p14="http://schemas.microsoft.com/office/powerpoint/2010/main" val="2596450619"/>
       </p:ext>
     </p:extLst>
   </p:cSld>
@@ -8057,7 +5154,7 @@
         <p:spPr>
           <a:xfrm>
             <a:off x="567542" y="491954"/>
-            <a:ext cx="3877985" cy="584775"/>
+            <a:ext cx="3057247" cy="584775"/>
           </a:xfrm>
           <a:prstGeom prst="rect">
             <a:avLst/>
@@ -8072,7 +5169,7 @@
           <a:p>
             <a:r>
               <a:rPr lang="ja-JP" altLang="en-US" sz="3200" b="1" u="sng" dirty="0"/>
-              <a:t>スマートポインター</a:t>
+              <a:t>マルチスレッド</a:t>
             </a:r>
             <a:endParaRPr kumimoji="1" lang="ja-JP" altLang="en-US" sz="3200" b="1" u="sng" dirty="0"/>
           </a:p>
@@ -8093,7 +5190,7 @@
         <p:spPr>
           <a:xfrm>
             <a:off x="567542" y="1216429"/>
-            <a:ext cx="8893781" cy="461665"/>
+            <a:ext cx="7571303" cy="830997"/>
           </a:xfrm>
           <a:prstGeom prst="rect">
             <a:avLst/>
@@ -8107,12 +5204,39 @@
           <a:lstStyle/>
           <a:p>
             <a:r>
-              <a:rPr lang="en-US" altLang="ja-JP" sz="2400" dirty="0"/>
-              <a:t>Unique</a:t>
-            </a:r>
-            <a:r>
               <a:rPr lang="ja-JP" altLang="en-US" sz="2400" dirty="0"/>
-              <a:t>は１つのみなので、「＝」によるコピーができません。</a:t>
+              <a:t>それぞれの文字列が</a:t>
+            </a:r>
+            <a:r>
+              <a:rPr lang="ja-JP" altLang="en-US" sz="2400" b="1" dirty="0">
+                <a:solidFill>
+                  <a:srgbClr val="FF0000"/>
+                </a:solidFill>
+              </a:rPr>
+              <a:t>バラバラな順番</a:t>
+            </a:r>
+            <a:r>
+              <a:rPr lang="ja-JP" altLang="en-US" sz="2400" dirty="0"/>
+              <a:t>で表示されます。</a:t>
+            </a:r>
+            <a:endParaRPr lang="en-US" altLang="ja-JP" sz="2400" dirty="0"/>
+          </a:p>
+          <a:p>
+            <a:r>
+              <a:rPr lang="ja-JP" altLang="en-US" sz="2400" dirty="0"/>
+              <a:t>また、</a:t>
+            </a:r>
+            <a:r>
+              <a:rPr lang="ja-JP" altLang="en-US" sz="2400" b="1" dirty="0">
+                <a:solidFill>
+                  <a:srgbClr val="FF0000"/>
+                </a:solidFill>
+              </a:rPr>
+              <a:t>実行するたびに順番が変わる</a:t>
+            </a:r>
+            <a:r>
+              <a:rPr lang="ja-JP" altLang="en-US" sz="2400" dirty="0"/>
+              <a:t>と思います。</a:t>
             </a:r>
             <a:endParaRPr lang="en-US" altLang="ja-JP" sz="2400" dirty="0"/>
           </a:p>
@@ -8120,10 +5244,10 @@
       </p:sp>
       <p:pic>
         <p:nvPicPr>
-          <p:cNvPr id="3" name="図 2">
-            <a:extLst>
-              <a:ext uri="{FF2B5EF4-FFF2-40B4-BE49-F238E27FC236}">
-                <a16:creationId xmlns:a16="http://schemas.microsoft.com/office/drawing/2014/main" id="{51FDF334-07D7-434A-9E05-E5E11CFD7C6A}"/>
+          <p:cNvPr id="5" name="図 4">
+            <a:extLst>
+              <a:ext uri="{FF2B5EF4-FFF2-40B4-BE49-F238E27FC236}">
+                <a16:creationId xmlns:a16="http://schemas.microsoft.com/office/drawing/2014/main" id="{8ACD98C4-A0C7-4BD1-B2C9-ADC672095078}"/>
               </a:ext>
             </a:extLst>
           </p:cNvPr>
@@ -8140,8 +5264,8 @@
         </p:blipFill>
         <p:spPr>
           <a:xfrm>
-            <a:off x="567541" y="1817794"/>
-            <a:ext cx="8380595" cy="934371"/>
+            <a:off x="567542" y="2187125"/>
+            <a:ext cx="5048512" cy="3688741"/>
           </a:xfrm>
           <a:prstGeom prst="rect">
             <a:avLst/>
@@ -8151,7 +5275,7 @@
     </p:spTree>
     <p:extLst>
       <p:ext uri="{BB962C8B-B14F-4D97-AF65-F5344CB8AC3E}">
-        <p14:creationId xmlns:p14="http://schemas.microsoft.com/office/powerpoint/2010/main" val="1459464116"/>
+        <p14:creationId xmlns:p14="http://schemas.microsoft.com/office/powerpoint/2010/main" val="3187550039"/>
       </p:ext>
     </p:extLst>
   </p:cSld>
@@ -8193,7 +5317,7 @@
         <p:spPr>
           <a:xfrm>
             <a:off x="567542" y="491954"/>
-            <a:ext cx="3877985" cy="584775"/>
+            <a:ext cx="3057247" cy="584775"/>
           </a:xfrm>
           <a:prstGeom prst="rect">
             <a:avLst/>
@@ -8208,7 +5332,7 @@
           <a:p>
             <a:r>
               <a:rPr lang="ja-JP" altLang="en-US" sz="3200" b="1" u="sng" dirty="0"/>
-              <a:t>スマートポインター</a:t>
+              <a:t>マルチスレッド</a:t>
             </a:r>
             <a:endParaRPr kumimoji="1" lang="ja-JP" altLang="en-US" sz="3200" b="1" u="sng" dirty="0"/>
           </a:p>
@@ -8229,7 +5353,7 @@
         <p:spPr>
           <a:xfrm>
             <a:off x="567542" y="1216429"/>
-            <a:ext cx="7404591" cy="1200329"/>
+            <a:ext cx="8186857" cy="830997"/>
           </a:xfrm>
           <a:prstGeom prst="rect">
             <a:avLst/>
@@ -8243,24 +5367,8 @@
           <a:lstStyle/>
           <a:p>
             <a:r>
-              <a:rPr lang="en-US" altLang="ja-JP" sz="2400" b="1" dirty="0">
-                <a:solidFill>
-                  <a:srgbClr val="0070C0"/>
-                </a:solidFill>
-              </a:rPr>
-              <a:t>get</a:t>
-            </a:r>
-            <a:r>
-              <a:rPr lang="ja-JP" altLang="en-US" sz="2400" b="1" dirty="0">
-                <a:solidFill>
-                  <a:srgbClr val="0070C0"/>
-                </a:solidFill>
-              </a:rPr>
-              <a:t>関数</a:t>
-            </a:r>
-            <a:r>
               <a:rPr lang="ja-JP" altLang="en-US" sz="2400" dirty="0"/>
-              <a:t>から</a:t>
+              <a:t>マルチスレッドは</a:t>
             </a:r>
             <a:r>
               <a:rPr lang="ja-JP" altLang="en-US" sz="2400" b="1" dirty="0">
@@ -8268,53 +5376,18 @@
                   <a:srgbClr val="FF0000"/>
                 </a:solidFill>
               </a:rPr>
-              <a:t>アクセス用のポインタ</a:t>
+              <a:t>同時進行</a:t>
             </a:r>
             <a:r>
               <a:rPr lang="ja-JP" altLang="en-US" sz="2400" dirty="0"/>
-              <a:t>を取得できます。</a:t>
+              <a:t>になります。</a:t>
             </a:r>
             <a:endParaRPr lang="en-US" altLang="ja-JP" sz="2400" dirty="0"/>
           </a:p>
           <a:p>
             <a:r>
               <a:rPr lang="ja-JP" altLang="en-US" sz="2400" dirty="0"/>
-              <a:t>ポインタを取得するだけで</a:t>
-            </a:r>
-            <a:r>
-              <a:rPr lang="ja-JP" altLang="en-US" sz="2400" b="1" dirty="0">
-                <a:solidFill>
-                  <a:srgbClr val="FF0000"/>
-                </a:solidFill>
-              </a:rPr>
-              <a:t>所有権は変わりません。</a:t>
-            </a:r>
-            <a:endParaRPr lang="en-US" altLang="ja-JP" sz="2400" b="1" dirty="0">
-              <a:solidFill>
-                <a:srgbClr val="FF0000"/>
-              </a:solidFill>
-            </a:endParaRPr>
-          </a:p>
-          <a:p>
-            <a:r>
-              <a:rPr lang="en-US" altLang="ja-JP" sz="2400" b="1" dirty="0">
-                <a:solidFill>
-                  <a:srgbClr val="0070C0"/>
-                </a:solidFill>
-              </a:rPr>
-              <a:t>Get</a:t>
-            </a:r>
-            <a:r>
-              <a:rPr lang="ja-JP" altLang="en-US" sz="2400" b="1" dirty="0">
-                <a:solidFill>
-                  <a:srgbClr val="0070C0"/>
-                </a:solidFill>
-              </a:rPr>
-              <a:t>〇〇関数</a:t>
-            </a:r>
-            <a:r>
-              <a:rPr lang="ja-JP" altLang="en-US" sz="2400" dirty="0"/>
-              <a:t>などでよく使われます。</a:t>
+              <a:t>つまり、スレッドごとの処理順は保証されなくなります。</a:t>
             </a:r>
             <a:endParaRPr lang="en-US" altLang="ja-JP" sz="2400" dirty="0"/>
           </a:p>
@@ -8322,10 +5395,10 @@
       </p:sp>
       <p:pic>
         <p:nvPicPr>
-          <p:cNvPr id="5" name="図 4">
-            <a:extLst>
-              <a:ext uri="{FF2B5EF4-FFF2-40B4-BE49-F238E27FC236}">
-                <a16:creationId xmlns:a16="http://schemas.microsoft.com/office/drawing/2014/main" id="{5E85E635-8FC4-4613-8DAB-F4C9FE39DDF2}"/>
+          <p:cNvPr id="3" name="図 2">
+            <a:extLst>
+              <a:ext uri="{FF2B5EF4-FFF2-40B4-BE49-F238E27FC236}">
+                <a16:creationId xmlns:a16="http://schemas.microsoft.com/office/drawing/2014/main" id="{32EA3B78-8D9A-4015-9E83-95B3E3627651}"/>
               </a:ext>
             </a:extLst>
           </p:cNvPr>
@@ -8342,18 +5415,149 @@
         </p:blipFill>
         <p:spPr>
           <a:xfrm>
-            <a:off x="567541" y="2556458"/>
-            <a:ext cx="7952179" cy="1200329"/>
+            <a:off x="567542" y="2169053"/>
+            <a:ext cx="2572892" cy="1938991"/>
           </a:xfrm>
           <a:prstGeom prst="rect">
             <a:avLst/>
           </a:prstGeom>
         </p:spPr>
       </p:pic>
+      <p:pic>
+        <p:nvPicPr>
+          <p:cNvPr id="8" name="図 7">
+            <a:extLst>
+              <a:ext uri="{FF2B5EF4-FFF2-40B4-BE49-F238E27FC236}">
+                <a16:creationId xmlns:a16="http://schemas.microsoft.com/office/drawing/2014/main" id="{823ED018-6B9D-4F9A-8B98-4290F08CFD68}"/>
+              </a:ext>
+            </a:extLst>
+          </p:cNvPr>
+          <p:cNvPicPr>
+            <a:picLocks noChangeAspect="1"/>
+          </p:cNvPicPr>
+          <p:nvPr/>
+        </p:nvPicPr>
+        <p:blipFill>
+          <a:blip r:embed="rId3"/>
+          <a:stretch>
+            <a:fillRect/>
+          </a:stretch>
+        </p:blipFill>
+        <p:spPr>
+          <a:xfrm>
+            <a:off x="4941269" y="2169053"/>
+            <a:ext cx="2522570" cy="1938991"/>
+          </a:xfrm>
+          <a:prstGeom prst="rect">
+            <a:avLst/>
+          </a:prstGeom>
+        </p:spPr>
+      </p:pic>
+      <p:sp>
+        <p:nvSpPr>
+          <p:cNvPr id="11" name="テキスト ボックス 10">
+            <a:extLst>
+              <a:ext uri="{FF2B5EF4-FFF2-40B4-BE49-F238E27FC236}">
+                <a16:creationId xmlns:a16="http://schemas.microsoft.com/office/drawing/2014/main" id="{808972A1-A9DC-4ABF-AEA0-AB2088B1BBFC}"/>
+              </a:ext>
+            </a:extLst>
+          </p:cNvPr>
+          <p:cNvSpPr txBox="1"/>
+          <p:nvPr/>
+        </p:nvSpPr>
+        <p:spPr>
+          <a:xfrm>
+            <a:off x="567542" y="4977999"/>
+            <a:ext cx="8244565" cy="1200329"/>
+          </a:xfrm>
+          <a:prstGeom prst="rect">
+            <a:avLst/>
+          </a:prstGeom>
+          <a:noFill/>
+        </p:spPr>
+        <p:txBody>
+          <a:bodyPr wrap="none" rtlCol="0">
+            <a:spAutoFit/>
+          </a:bodyPr>
+          <a:lstStyle/>
+          <a:p>
+            <a:r>
+              <a:rPr lang="en-US" altLang="ja-JP" sz="2400" b="1" dirty="0">
+                <a:solidFill>
+                  <a:srgbClr val="00B050"/>
+                </a:solidFill>
+              </a:rPr>
+              <a:t>MEMO</a:t>
+            </a:r>
+          </a:p>
+          <a:p>
+            <a:r>
+              <a:rPr lang="ja-JP" altLang="en-US" sz="2400" dirty="0"/>
+              <a:t>処理順が保証されることを</a:t>
+            </a:r>
+            <a:r>
+              <a:rPr lang="ja-JP" altLang="en-US" sz="2400" b="1" dirty="0">
+                <a:solidFill>
+                  <a:srgbClr val="FF0000"/>
+                </a:solidFill>
+              </a:rPr>
+              <a:t>スレッドセーフ</a:t>
+            </a:r>
+            <a:r>
+              <a:rPr lang="ja-JP" altLang="en-US" sz="2400" dirty="0"/>
+              <a:t>と言います。</a:t>
+            </a:r>
+            <a:endParaRPr lang="en-US" altLang="ja-JP" sz="2400" dirty="0"/>
+          </a:p>
+          <a:p>
+            <a:r>
+              <a:rPr lang="ja-JP" altLang="en-US" sz="2400" dirty="0"/>
+              <a:t>つまり</a:t>
+            </a:r>
+            <a:r>
+              <a:rPr lang="en-US" altLang="ja-JP" sz="2400" b="1" dirty="0" err="1">
+                <a:solidFill>
+                  <a:srgbClr val="FF0000"/>
+                </a:solidFill>
+              </a:rPr>
+              <a:t>SubA</a:t>
+            </a:r>
+            <a:r>
+              <a:rPr lang="ja-JP" altLang="en-US" sz="2400" b="1" dirty="0">
+                <a:solidFill>
+                  <a:srgbClr val="FF0000"/>
+                </a:solidFill>
+              </a:rPr>
+              <a:t>と</a:t>
+            </a:r>
+            <a:r>
+              <a:rPr lang="en-US" altLang="ja-JP" sz="2400" b="1" dirty="0" err="1">
+                <a:solidFill>
+                  <a:srgbClr val="FF0000"/>
+                </a:solidFill>
+              </a:rPr>
+              <a:t>SubB</a:t>
+            </a:r>
+            <a:r>
+              <a:rPr lang="ja-JP" altLang="en-US" sz="2400" b="1" dirty="0">
+                <a:solidFill>
+                  <a:srgbClr val="FF0000"/>
+                </a:solidFill>
+              </a:rPr>
+              <a:t>はスレッドセーフでない</a:t>
+            </a:r>
+            <a:r>
+              <a:rPr lang="ja-JP" altLang="en-US" sz="2400" dirty="0"/>
+              <a:t>と言えます。</a:t>
+            </a:r>
+            <a:endParaRPr lang="en-US" altLang="ja-JP" sz="2400" dirty="0"/>
+          </a:p>
+        </p:txBody>
+      </p:sp>
     </p:spTree>
     <p:extLst>
       <p:ext uri="{BB962C8B-B14F-4D97-AF65-F5344CB8AC3E}">
-        <p14:creationId xmlns:p14="http://schemas.microsoft.com/office/powerpoint/2010/main" val="3167405155"/>
+        <p14:creationId xmlns:p14="http://schemas.microsoft.com/office/powerpoint/2010/main" val="497162207"/>
       </p:ext>
     </p:extLst>
   </p:cSld>
@@ -8395,7 +5599,7 @@
         <p:spPr>
           <a:xfrm>
             <a:off x="567542" y="491954"/>
-            <a:ext cx="3877985" cy="584775"/>
+            <a:ext cx="3057247" cy="584775"/>
           </a:xfrm>
           <a:prstGeom prst="rect">
             <a:avLst/>
@@ -8410,7 +5614,7 @@
           <a:p>
             <a:r>
               <a:rPr lang="ja-JP" altLang="en-US" sz="3200" b="1" u="sng" dirty="0"/>
-              <a:t>スマートポインター</a:t>
+              <a:t>マルチスレッド</a:t>
             </a:r>
             <a:endParaRPr kumimoji="1" lang="ja-JP" altLang="en-US" sz="3200" b="1" u="sng" dirty="0"/>
           </a:p>
@@ -8431,7 +5635,7 @@
         <p:spPr>
           <a:xfrm>
             <a:off x="567542" y="1216429"/>
-            <a:ext cx="9725739" cy="830997"/>
+            <a:ext cx="10033516" cy="5262979"/>
           </a:xfrm>
           <a:prstGeom prst="rect">
             <a:avLst/>
@@ -8446,143 +5650,94 @@
           <a:p>
             <a:r>
               <a:rPr lang="ja-JP" altLang="en-US" sz="2400" dirty="0"/>
-              <a:t>１つしかないので、他の変数に与えるには</a:t>
-            </a:r>
+              <a:t>マルチスレッドはゲームのロードによく使われます。</a:t>
+            </a:r>
+            <a:endParaRPr lang="en-US" altLang="ja-JP" sz="2400" dirty="0"/>
+          </a:p>
+          <a:p>
+            <a:endParaRPr lang="en-US" altLang="ja-JP" sz="2400" dirty="0"/>
+          </a:p>
+          <a:p>
             <a:r>
               <a:rPr lang="ja-JP" altLang="en-US" sz="2400" b="1" dirty="0">
                 <a:solidFill>
                   <a:srgbClr val="FF0000"/>
                 </a:solidFill>
               </a:rPr>
-              <a:t>移動</a:t>
-            </a:r>
+              <a:t>■使用例</a:t>
+            </a:r>
+            <a:endParaRPr lang="en-US" altLang="ja-JP" sz="2400" b="1" dirty="0">
+              <a:solidFill>
+                <a:srgbClr val="FF0000"/>
+              </a:solidFill>
+            </a:endParaRPr>
+          </a:p>
+          <a:p>
             <a:r>
               <a:rPr lang="ja-JP" altLang="en-US" sz="2400" dirty="0"/>
-              <a:t>するしかありません。</a:t>
+              <a:t>・ロード中画面</a:t>
             </a:r>
             <a:endParaRPr lang="en-US" altLang="ja-JP" sz="2400" dirty="0"/>
           </a:p>
           <a:p>
             <a:r>
               <a:rPr lang="ja-JP" altLang="en-US" sz="2400" dirty="0"/>
-              <a:t>移動には</a:t>
-            </a:r>
-            <a:r>
-              <a:rPr lang="en-US" altLang="ja-JP" sz="2400" b="1" dirty="0">
-                <a:solidFill>
-                  <a:srgbClr val="0070C0"/>
-                </a:solidFill>
-              </a:rPr>
-              <a:t>move</a:t>
-            </a:r>
-            <a:r>
-              <a:rPr lang="ja-JP" altLang="en-US" sz="2400" b="1" dirty="0">
-                <a:solidFill>
-                  <a:srgbClr val="0070C0"/>
-                </a:solidFill>
-              </a:rPr>
-              <a:t>関数</a:t>
-            </a:r>
+              <a:t>　・画面描画とロード処理を同時進行</a:t>
+            </a:r>
+            <a:endParaRPr lang="en-US" altLang="ja-JP" sz="2400" dirty="0"/>
+          </a:p>
+          <a:p>
+            <a:endParaRPr lang="en-US" altLang="ja-JP" sz="2400" dirty="0"/>
+          </a:p>
+          <a:p>
             <a:r>
               <a:rPr lang="ja-JP" altLang="en-US" sz="2400" dirty="0"/>
-              <a:t>を使います。</a:t>
+              <a:t>・先読みによるロード時間短縮</a:t>
             </a:r>
             <a:endParaRPr lang="en-US" altLang="ja-JP" sz="2400" dirty="0"/>
           </a:p>
-        </p:txBody>
-      </p:sp>
-      <p:pic>
-        <p:nvPicPr>
-          <p:cNvPr id="3" name="図 2">
-            <a:extLst>
-              <a:ext uri="{FF2B5EF4-FFF2-40B4-BE49-F238E27FC236}">
-                <a16:creationId xmlns:a16="http://schemas.microsoft.com/office/drawing/2014/main" id="{A132A32B-9918-4358-8218-8E1AD1B5274D}"/>
-              </a:ext>
-            </a:extLst>
-          </p:cNvPr>
-          <p:cNvPicPr>
-            <a:picLocks noChangeAspect="1"/>
-          </p:cNvPicPr>
-          <p:nvPr/>
-        </p:nvPicPr>
-        <p:blipFill>
-          <a:blip r:embed="rId2"/>
-          <a:stretch>
-            <a:fillRect/>
-          </a:stretch>
-        </p:blipFill>
-        <p:spPr>
-          <a:xfrm>
-            <a:off x="567542" y="2187126"/>
-            <a:ext cx="7627648" cy="2623449"/>
-          </a:xfrm>
-          <a:prstGeom prst="rect">
-            <a:avLst/>
-          </a:prstGeom>
-        </p:spPr>
-      </p:pic>
-      <p:sp>
-        <p:nvSpPr>
-          <p:cNvPr id="9" name="テキスト ボックス 8">
-            <a:extLst>
-              <a:ext uri="{FF2B5EF4-FFF2-40B4-BE49-F238E27FC236}">
-                <a16:creationId xmlns:a16="http://schemas.microsoft.com/office/drawing/2014/main" id="{0E60D74F-8CE1-48B1-8E5C-C856F3941590}"/>
-              </a:ext>
-            </a:extLst>
-          </p:cNvPr>
-          <p:cNvSpPr txBox="1"/>
-          <p:nvPr/>
-        </p:nvSpPr>
-        <p:spPr>
-          <a:xfrm>
-            <a:off x="567541" y="4950275"/>
-            <a:ext cx="5806398" cy="830997"/>
-          </a:xfrm>
-          <a:prstGeom prst="rect">
-            <a:avLst/>
-          </a:prstGeom>
-          <a:noFill/>
-        </p:spPr>
-        <p:txBody>
-          <a:bodyPr wrap="none" rtlCol="0">
-            <a:spAutoFit/>
-          </a:bodyPr>
-          <a:lstStyle/>
+          <a:p>
+            <a:r>
+              <a:rPr lang="ja-JP" altLang="en-US" sz="2400" dirty="0"/>
+              <a:t>　・格闘ゲームのキャラクター選択画面</a:t>
+            </a:r>
+            <a:endParaRPr lang="en-US" altLang="ja-JP" sz="2400" dirty="0"/>
+          </a:p>
+          <a:p>
+            <a:r>
+              <a:rPr lang="ja-JP" altLang="en-US" sz="2400" dirty="0"/>
+              <a:t>　　・選択された瞬間からサブスレッドでロード開始</a:t>
+            </a:r>
+            <a:endParaRPr lang="en-US" altLang="ja-JP" sz="2400" dirty="0"/>
+          </a:p>
+          <a:p>
+            <a:endParaRPr lang="en-US" altLang="ja-JP" sz="2400" dirty="0"/>
+          </a:p>
+          <a:p>
+            <a:r>
+              <a:rPr lang="ja-JP" altLang="en-US" sz="2400" dirty="0"/>
+              <a:t>・オープンワールド</a:t>
+            </a:r>
+            <a:endParaRPr lang="en-US" altLang="ja-JP" sz="2400" dirty="0"/>
+          </a:p>
+          <a:p>
+            <a:r>
+              <a:rPr lang="ja-JP" altLang="en-US" sz="2400" dirty="0"/>
+              <a:t>　・画面に映らない遠くのステージをサブスレッドでロードしておく</a:t>
+            </a:r>
+            <a:endParaRPr lang="en-US" altLang="ja-JP" sz="2400" dirty="0"/>
+          </a:p>
+          <a:p>
+            <a:endParaRPr lang="en-US" altLang="ja-JP" sz="2400" dirty="0"/>
+          </a:p>
           <a:p>
             <a:r>
               <a:rPr lang="en-US" altLang="ja-JP" sz="2400" dirty="0"/>
-              <a:t>player</a:t>
+              <a:t>※</a:t>
             </a:r>
             <a:r>
               <a:rPr lang="ja-JP" altLang="en-US" sz="2400" dirty="0"/>
-              <a:t>→</a:t>
-            </a:r>
-            <a:r>
-              <a:rPr lang="en-US" altLang="ja-JP" sz="2400" dirty="0"/>
-              <a:t>player2</a:t>
-            </a:r>
-            <a:r>
-              <a:rPr lang="ja-JP" altLang="en-US" sz="2400" dirty="0"/>
-              <a:t>へと移動しているので、</a:t>
-            </a:r>
-            <a:endParaRPr lang="en-US" altLang="ja-JP" sz="2400" dirty="0"/>
-          </a:p>
-          <a:p>
-            <a:r>
-              <a:rPr lang="en-US" altLang="ja-JP" sz="2400" dirty="0"/>
-              <a:t>player</a:t>
-            </a:r>
-            <a:r>
-              <a:rPr lang="ja-JP" altLang="en-US" sz="2400" dirty="0"/>
-              <a:t>は</a:t>
-            </a:r>
-            <a:r>
-              <a:rPr lang="en-US" altLang="ja-JP" sz="2400" b="1" dirty="0">
-                <a:solidFill>
-                  <a:srgbClr val="FF0000"/>
-                </a:solidFill>
-              </a:rPr>
-              <a:t>empty</a:t>
+              <a:t>ゲーム進行とロードを同時にすることを</a:t>
             </a:r>
             <a:r>
               <a:rPr lang="ja-JP" altLang="en-US" sz="2400" b="1" dirty="0">
@@ -8590,11 +5745,11 @@
                   <a:srgbClr val="FF0000"/>
                 </a:solidFill>
               </a:rPr>
-              <a:t>（空）</a:t>
+              <a:t>ストリーミング</a:t>
             </a:r>
             <a:r>
               <a:rPr lang="ja-JP" altLang="en-US" sz="2400" dirty="0"/>
-              <a:t>となります。</a:t>
+              <a:t>と言います。</a:t>
             </a:r>
             <a:endParaRPr lang="en-US" altLang="ja-JP" sz="2400" dirty="0"/>
           </a:p>
@@ -8603,7 +5758,7 @@
     </p:spTree>
     <p:extLst>
       <p:ext uri="{BB962C8B-B14F-4D97-AF65-F5344CB8AC3E}">
-        <p14:creationId xmlns:p14="http://schemas.microsoft.com/office/powerpoint/2010/main" val="3128689517"/>
+        <p14:creationId xmlns:p14="http://schemas.microsoft.com/office/powerpoint/2010/main" val="3997604351"/>
       </p:ext>
     </p:extLst>
   </p:cSld>
